--- a/reference_material/slides/019A_Survival_Hazard.pptx
+++ b/reference_material/slides/019A_Survival_Hazard.pptx
@@ -5,34 +5,36 @@
     <p:sldMasterId id="2147483677" r:id="rId4"/>
   </p:sldMasterIdLst>
   <p:sldIdLst>
-    <p:sldId id="256" r:id="rId5"/>
-    <p:sldId id="257" r:id="rId6"/>
-    <p:sldId id="258" r:id="rId7"/>
-    <p:sldId id="259" r:id="rId8"/>
-    <p:sldId id="273" r:id="rId9"/>
-    <p:sldId id="260" r:id="rId10"/>
-    <p:sldId id="281" r:id="rId11"/>
-    <p:sldId id="262" r:id="rId12"/>
-    <p:sldId id="267" r:id="rId13"/>
-    <p:sldId id="263" r:id="rId14"/>
-    <p:sldId id="266" r:id="rId15"/>
-    <p:sldId id="264" r:id="rId16"/>
-    <p:sldId id="275" r:id="rId17"/>
-    <p:sldId id="278" r:id="rId18"/>
-    <p:sldId id="282" r:id="rId19"/>
-    <p:sldId id="261" r:id="rId20"/>
-    <p:sldId id="265" r:id="rId21"/>
-    <p:sldId id="279" r:id="rId22"/>
-    <p:sldId id="280" r:id="rId23"/>
-    <p:sldId id="277" r:id="rId24"/>
-    <p:sldId id="270" r:id="rId25"/>
-    <p:sldId id="283" r:id="rId26"/>
-    <p:sldId id="268" r:id="rId27"/>
-    <p:sldId id="272" r:id="rId28"/>
-    <p:sldId id="269" r:id="rId29"/>
-    <p:sldId id="274" r:id="rId30"/>
-    <p:sldId id="276" r:id="rId31"/>
-    <p:sldId id="271" r:id="rId32"/>
+    <p:sldId id="284" r:id="rId5"/>
+    <p:sldId id="285" r:id="rId6"/>
+    <p:sldId id="256" r:id="rId7"/>
+    <p:sldId id="257" r:id="rId8"/>
+    <p:sldId id="258" r:id="rId9"/>
+    <p:sldId id="259" r:id="rId10"/>
+    <p:sldId id="273" r:id="rId11"/>
+    <p:sldId id="260" r:id="rId12"/>
+    <p:sldId id="281" r:id="rId13"/>
+    <p:sldId id="262" r:id="rId14"/>
+    <p:sldId id="267" r:id="rId15"/>
+    <p:sldId id="263" r:id="rId16"/>
+    <p:sldId id="266" r:id="rId17"/>
+    <p:sldId id="264" r:id="rId18"/>
+    <p:sldId id="275" r:id="rId19"/>
+    <p:sldId id="278" r:id="rId20"/>
+    <p:sldId id="282" r:id="rId21"/>
+    <p:sldId id="261" r:id="rId22"/>
+    <p:sldId id="265" r:id="rId23"/>
+    <p:sldId id="279" r:id="rId24"/>
+    <p:sldId id="280" r:id="rId25"/>
+    <p:sldId id="277" r:id="rId26"/>
+    <p:sldId id="270" r:id="rId27"/>
+    <p:sldId id="283" r:id="rId28"/>
+    <p:sldId id="268" r:id="rId29"/>
+    <p:sldId id="272" r:id="rId30"/>
+    <p:sldId id="269" r:id="rId31"/>
+    <p:sldId id="274" r:id="rId32"/>
+    <p:sldId id="276" r:id="rId33"/>
+    <p:sldId id="271" r:id="rId34"/>
   </p:sldIdLst>
   <p:sldSz cx="12192000" cy="6858000"/>
   <p:notesSz cx="6858000" cy="9144000"/>
@@ -1008,7 +1010,7 @@
           <a:p>
             <a:fld id="{7DBE0230-AD19-48CE-900D-EFFAD2759F56}" type="datetimeFigureOut">
               <a:rPr lang="LID4096" smtClean="0"/>
-              <a:t>10/20/26</a:t>
+              <a:t>10/23/26</a:t>
             </a:fld>
             <a:endParaRPr lang="LID4096"/>
           </a:p>
@@ -1219,7 +1221,7 @@
           <a:p>
             <a:fld id="{7DBE0230-AD19-48CE-900D-EFFAD2759F56}" type="datetimeFigureOut">
               <a:rPr lang="LID4096" smtClean="0"/>
-              <a:t>10/20/26</a:t>
+              <a:t>10/23/26</a:t>
             </a:fld>
             <a:endParaRPr lang="LID4096"/>
           </a:p>
@@ -1434,7 +1436,7 @@
           <a:p>
             <a:fld id="{7DBE0230-AD19-48CE-900D-EFFAD2759F56}" type="datetimeFigureOut">
               <a:rPr lang="LID4096" smtClean="0"/>
-              <a:t>10/20/26</a:t>
+              <a:t>10/23/26</a:t>
             </a:fld>
             <a:endParaRPr lang="LID4096"/>
           </a:p>
@@ -1635,7 +1637,7 @@
           <a:p>
             <a:fld id="{7DBE0230-AD19-48CE-900D-EFFAD2759F56}" type="datetimeFigureOut">
               <a:rPr lang="LID4096" smtClean="0"/>
-              <a:t>10/20/26</a:t>
+              <a:t>10/23/26</a:t>
             </a:fld>
             <a:endParaRPr lang="LID4096"/>
           </a:p>
@@ -1914,7 +1916,7 @@
           <a:p>
             <a:fld id="{7DBE0230-AD19-48CE-900D-EFFAD2759F56}" type="datetimeFigureOut">
               <a:rPr lang="LID4096" smtClean="0"/>
-              <a:t>10/20/26</a:t>
+              <a:t>10/23/26</a:t>
             </a:fld>
             <a:endParaRPr lang="LID4096"/>
           </a:p>
@@ -2182,7 +2184,7 @@
           <a:p>
             <a:fld id="{7DBE0230-AD19-48CE-900D-EFFAD2759F56}" type="datetimeFigureOut">
               <a:rPr lang="LID4096" smtClean="0"/>
-              <a:t>10/20/26</a:t>
+              <a:t>10/23/26</a:t>
             </a:fld>
             <a:endParaRPr lang="LID4096"/>
           </a:p>
@@ -2598,7 +2600,7 @@
           <a:p>
             <a:fld id="{7DBE0230-AD19-48CE-900D-EFFAD2759F56}" type="datetimeFigureOut">
               <a:rPr lang="LID4096" smtClean="0"/>
-              <a:t>10/20/26</a:t>
+              <a:t>10/23/26</a:t>
             </a:fld>
             <a:endParaRPr lang="LID4096"/>
           </a:p>
@@ -2747,7 +2749,7 @@
           <a:p>
             <a:fld id="{7DBE0230-AD19-48CE-900D-EFFAD2759F56}" type="datetimeFigureOut">
               <a:rPr lang="LID4096" smtClean="0"/>
-              <a:t>10/20/26</a:t>
+              <a:t>10/23/26</a:t>
             </a:fld>
             <a:endParaRPr lang="LID4096"/>
           </a:p>
@@ -2873,7 +2875,7 @@
           <a:p>
             <a:fld id="{7DBE0230-AD19-48CE-900D-EFFAD2759F56}" type="datetimeFigureOut">
               <a:rPr lang="LID4096" smtClean="0"/>
-              <a:t>10/20/26</a:t>
+              <a:t>10/23/26</a:t>
             </a:fld>
             <a:endParaRPr lang="LID4096"/>
           </a:p>
@@ -3124,7 +3126,7 @@
           <a:p>
             <a:fld id="{7DBE0230-AD19-48CE-900D-EFFAD2759F56}" type="datetimeFigureOut">
               <a:rPr lang="LID4096" smtClean="0"/>
-              <a:t>10/20/26</a:t>
+              <a:t>10/23/26</a:t>
             </a:fld>
             <a:endParaRPr lang="LID4096"/>
           </a:p>
@@ -3569,7 +3571,7 @@
           <a:p>
             <a:fld id="{7DBE0230-AD19-48CE-900D-EFFAD2759F56}" type="datetimeFigureOut">
               <a:rPr lang="LID4096" smtClean="0"/>
-              <a:t>10/20/26</a:t>
+              <a:t>10/23/26</a:t>
             </a:fld>
             <a:endParaRPr lang="LID4096"/>
           </a:p>
@@ -3903,7 +3905,7 @@
           <a:p>
             <a:fld id="{7DBE0230-AD19-48CE-900D-EFFAD2759F56}" type="datetimeFigureOut">
               <a:rPr lang="LID4096" smtClean="0"/>
-              <a:t>10/20/26</a:t>
+              <a:t>10/23/26</a:t>
             </a:fld>
             <a:endParaRPr lang="LID4096"/>
           </a:p>
@@ -4394,7 +4396,7 @@
           <p:cNvPr id="2" name="Title 1">
             <a:extLst>
               <a:ext uri="{FF2B5EF4-FFF2-40B4-BE49-F238E27FC236}">
-                <a16:creationId xmlns:a16="http://schemas.microsoft.com/office/drawing/2014/main" id="{ED476E18-0649-6AB1-C492-241746DCA6B9}"/>
+                <a16:creationId xmlns:a16="http://schemas.microsoft.com/office/drawing/2014/main" id="{B2CDB0B4-B9CE-5842-3D1B-C8525086E259}"/>
               </a:ext>
             </a:extLst>
           </p:cNvPr>
@@ -4402,7 +4404,7 @@
             <a:spLocks noGrp="1"/>
           </p:cNvSpPr>
           <p:nvPr>
-            <p:ph type="ctrTitle"/>
+            <p:ph type="title"/>
           </p:nvPr>
         </p:nvSpPr>
         <p:spPr/>
@@ -4412,17 +4414,17 @@
           <a:p>
             <a:r>
               <a:rPr lang="en-US" dirty="0"/>
-              <a:t>Survival and Hazards</a:t>
-            </a:r>
-          </a:p>
-        </p:txBody>
-      </p:sp>
-      <p:sp>
-        <p:nvSpPr>
-          <p:cNvPr id="3" name="Subtitle 2">
+              <a:t>Housekeeping</a:t>
+            </a:r>
+          </a:p>
+        </p:txBody>
+      </p:sp>
+      <p:sp>
+        <p:nvSpPr>
+          <p:cNvPr id="3" name="Content Placeholder 2">
             <a:extLst>
               <a:ext uri="{FF2B5EF4-FFF2-40B4-BE49-F238E27FC236}">
-                <a16:creationId xmlns:a16="http://schemas.microsoft.com/office/drawing/2014/main" id="{4ED31903-EAF8-3979-D108-06C244A70FAE}"/>
+                <a16:creationId xmlns:a16="http://schemas.microsoft.com/office/drawing/2014/main" id="{3136D710-F220-D91B-300F-048B04B3504D}"/>
               </a:ext>
             </a:extLst>
           </p:cNvPr>
@@ -4430,7 +4432,7 @@
             <a:spLocks noGrp="1"/>
           </p:cNvSpPr>
           <p:nvPr>
-            <p:ph type="subTitle" idx="1"/>
+            <p:ph idx="1"/>
           </p:nvPr>
         </p:nvSpPr>
         <p:spPr/>
@@ -4438,14 +4440,36 @@
           <a:bodyPr/>
           <a:lstStyle/>
           <a:p>
-            <a:endParaRPr lang="en-US"/>
+            <a:r>
+              <a:rPr lang="en-US" dirty="0"/>
+              <a:t>Today – Survival and Hazards (ch 13, wb19A – pull for updates). </a:t>
+            </a:r>
+          </a:p>
+          <a:p>
+            <a:r>
+              <a:rPr lang="en-US" dirty="0"/>
+              <a:t>Exam marks up. </a:t>
+            </a:r>
+          </a:p>
+          <a:p>
+            <a:r>
+              <a:rPr lang="en-US" dirty="0"/>
+              <a:t>There’s a new assignment:</a:t>
+            </a:r>
+          </a:p>
+          <a:p>
+            <a:pPr lvl="1"/>
+            <a:r>
+              <a:rPr lang="en-US" dirty="0"/>
+              <a:t>One part probability simulation, one part regression (should get there soon enough)</a:t>
+            </a:r>
           </a:p>
         </p:txBody>
       </p:sp>
     </p:spTree>
     <p:extLst>
       <p:ext uri="{BB962C8B-B14F-4D97-AF65-F5344CB8AC3E}">
-        <p14:creationId xmlns:p14="http://schemas.microsoft.com/office/powerpoint/2010/main" val="2700347393"/>
+        <p14:creationId xmlns:p14="http://schemas.microsoft.com/office/powerpoint/2010/main" val="155374141"/>
       </p:ext>
     </p:extLst>
   </p:cSld>
@@ -4456,6 +4480,286 @@
 </file>
 
 <file path=ppt/slides/slide10.xml><?xml version="1.0" encoding="utf-8"?>
+<p:sld xmlns:a="http://schemas.openxmlformats.org/drawingml/2006/main" xmlns:r="http://schemas.openxmlformats.org/officeDocument/2006/relationships" xmlns:p="http://schemas.openxmlformats.org/presentationml/2006/main">
+  <p:cSld>
+    <p:spTree>
+      <p:nvGrpSpPr>
+        <p:cNvPr id="1" name=""/>
+        <p:cNvGrpSpPr/>
+        <p:nvPr/>
+      </p:nvGrpSpPr>
+      <p:grpSpPr>
+        <a:xfrm>
+          <a:off x="0" y="0"/>
+          <a:ext cx="0" cy="0"/>
+          <a:chOff x="0" y="0"/>
+          <a:chExt cx="0" cy="0"/>
+        </a:xfrm>
+      </p:grpSpPr>
+      <p:sp>
+        <p:nvSpPr>
+          <p:cNvPr id="2" name="Title 1">
+            <a:extLst>
+              <a:ext uri="{FF2B5EF4-FFF2-40B4-BE49-F238E27FC236}">
+                <a16:creationId xmlns:a16="http://schemas.microsoft.com/office/drawing/2014/main" id="{EC11E58B-7914-00EE-E8C1-AD7DF4B6D84D}"/>
+              </a:ext>
+            </a:extLst>
+          </p:cNvPr>
+          <p:cNvSpPr>
+            <a:spLocks noGrp="1"/>
+          </p:cNvSpPr>
+          <p:nvPr>
+            <p:ph type="title"/>
+          </p:nvPr>
+        </p:nvSpPr>
+        <p:spPr/>
+        <p:txBody>
+          <a:bodyPr/>
+          <a:lstStyle/>
+          <a:p>
+            <a:r>
+              <a:rPr lang="en-US" dirty="0"/>
+              <a:t>Survival Functions</a:t>
+            </a:r>
+          </a:p>
+        </p:txBody>
+      </p:sp>
+      <p:sp>
+        <p:nvSpPr>
+          <p:cNvPr id="3" name="Content Placeholder 2">
+            <a:extLst>
+              <a:ext uri="{FF2B5EF4-FFF2-40B4-BE49-F238E27FC236}">
+                <a16:creationId xmlns:a16="http://schemas.microsoft.com/office/drawing/2014/main" id="{5A0757C6-B0CD-58BE-F79E-ED41A8D9D03D}"/>
+              </a:ext>
+            </a:extLst>
+          </p:cNvPr>
+          <p:cNvSpPr>
+            <a:spLocks noGrp="1"/>
+          </p:cNvSpPr>
+          <p:nvPr>
+            <p:ph idx="1"/>
+          </p:nvPr>
+        </p:nvSpPr>
+        <p:spPr>
+          <a:xfrm>
+            <a:off x="6253215" y="2015732"/>
+            <a:ext cx="5757171" cy="3450613"/>
+          </a:xfrm>
+        </p:spPr>
+        <p:txBody>
+          <a:bodyPr/>
+          <a:lstStyle/>
+          <a:p>
+            <a:r>
+              <a:rPr lang="en-US" dirty="0"/>
+              <a:t>Survival functions look like this(–</a:t>
+            </a:r>
+            <a:r>
+              <a:rPr lang="en-US" dirty="0" err="1"/>
+              <a:t>ish</a:t>
+            </a:r>
+            <a:r>
+              <a:rPr lang="en-US" dirty="0"/>
+              <a:t>) when plotted.</a:t>
+            </a:r>
+          </a:p>
+          <a:p>
+            <a:r>
+              <a:rPr lang="en-US" dirty="0"/>
+              <a:t>Track total up to that point. </a:t>
+            </a:r>
+          </a:p>
+          <a:p>
+            <a:pPr lvl="1"/>
+            <a:r>
+              <a:rPr lang="en-US" dirty="0"/>
+              <a:t>How many are left?</a:t>
+            </a:r>
+          </a:p>
+        </p:txBody>
+      </p:sp>
+      <p:pic>
+        <p:nvPicPr>
+          <p:cNvPr id="4" name="Picture 3">
+            <a:extLst>
+              <a:ext uri="{FF2B5EF4-FFF2-40B4-BE49-F238E27FC236}">
+                <a16:creationId xmlns:a16="http://schemas.microsoft.com/office/drawing/2014/main" id="{7A653A07-9087-2046-8B74-1A363F0A1121}"/>
+              </a:ext>
+            </a:extLst>
+          </p:cNvPr>
+          <p:cNvPicPr>
+            <a:picLocks noChangeAspect="1"/>
+          </p:cNvPicPr>
+          <p:nvPr/>
+        </p:nvPicPr>
+        <p:blipFill>
+          <a:blip r:embed="rId2"/>
+          <a:stretch>
+            <a:fillRect/>
+          </a:stretch>
+        </p:blipFill>
+        <p:spPr>
+          <a:xfrm>
+            <a:off x="181613" y="2182113"/>
+            <a:ext cx="6071603" cy="3117850"/>
+          </a:xfrm>
+          <a:prstGeom prst="rect">
+            <a:avLst/>
+          </a:prstGeom>
+        </p:spPr>
+      </p:pic>
+    </p:spTree>
+    <p:extLst>
+      <p:ext uri="{BB962C8B-B14F-4D97-AF65-F5344CB8AC3E}">
+        <p14:creationId xmlns:p14="http://schemas.microsoft.com/office/powerpoint/2010/main" val="3057595040"/>
+      </p:ext>
+    </p:extLst>
+  </p:cSld>
+  <p:clrMapOvr>
+    <a:masterClrMapping/>
+  </p:clrMapOvr>
+</p:sld>
+</file>
+
+<file path=ppt/slides/slide11.xml><?xml version="1.0" encoding="utf-8"?>
+<p:sld xmlns:a="http://schemas.openxmlformats.org/drawingml/2006/main" xmlns:r="http://schemas.openxmlformats.org/officeDocument/2006/relationships" xmlns:p="http://schemas.openxmlformats.org/presentationml/2006/main">
+  <p:cSld>
+    <p:spTree>
+      <p:nvGrpSpPr>
+        <p:cNvPr id="1" name=""/>
+        <p:cNvGrpSpPr/>
+        <p:nvPr/>
+      </p:nvGrpSpPr>
+      <p:grpSpPr>
+        <a:xfrm>
+          <a:off x="0" y="0"/>
+          <a:ext cx="0" cy="0"/>
+          <a:chOff x="0" y="0"/>
+          <a:chExt cx="0" cy="0"/>
+        </a:xfrm>
+      </p:grpSpPr>
+      <p:sp>
+        <p:nvSpPr>
+          <p:cNvPr id="2" name="Title 1">
+            <a:extLst>
+              <a:ext uri="{FF2B5EF4-FFF2-40B4-BE49-F238E27FC236}">
+                <a16:creationId xmlns:a16="http://schemas.microsoft.com/office/drawing/2014/main" id="{170AC16D-4043-CA71-C9C5-FB282683A38A}"/>
+              </a:ext>
+            </a:extLst>
+          </p:cNvPr>
+          <p:cNvSpPr>
+            <a:spLocks noGrp="1"/>
+          </p:cNvSpPr>
+          <p:nvPr>
+            <p:ph type="title"/>
+          </p:nvPr>
+        </p:nvSpPr>
+        <p:spPr/>
+        <p:txBody>
+          <a:bodyPr/>
+          <a:lstStyle/>
+          <a:p>
+            <a:r>
+              <a:rPr lang="en-US" dirty="0"/>
+              <a:t>Kaplan Meier Curve</a:t>
+            </a:r>
+          </a:p>
+        </p:txBody>
+      </p:sp>
+      <p:sp>
+        <p:nvSpPr>
+          <p:cNvPr id="3" name="Content Placeholder 2">
+            <a:extLst>
+              <a:ext uri="{FF2B5EF4-FFF2-40B4-BE49-F238E27FC236}">
+                <a16:creationId xmlns:a16="http://schemas.microsoft.com/office/drawing/2014/main" id="{9102623E-1C1B-BB5C-D7A7-FC704EA9F7A8}"/>
+              </a:ext>
+            </a:extLst>
+          </p:cNvPr>
+          <p:cNvSpPr>
+            <a:spLocks noGrp="1"/>
+          </p:cNvSpPr>
+          <p:nvPr>
+            <p:ph idx="1"/>
+          </p:nvPr>
+        </p:nvSpPr>
+        <p:spPr>
+          <a:xfrm>
+            <a:off x="8216900" y="2015732"/>
+            <a:ext cx="3746499" cy="3450613"/>
+          </a:xfrm>
+        </p:spPr>
+        <p:txBody>
+          <a:bodyPr/>
+          <a:lstStyle/>
+          <a:p>
+            <a:r>
+              <a:rPr lang="en-US" dirty="0"/>
+              <a:t>This type of plot is a KM curve, and is common in survival. </a:t>
+            </a:r>
+          </a:p>
+          <a:p>
+            <a:pPr lvl="1"/>
+            <a:r>
+              <a:rPr lang="en-US" dirty="0"/>
+              <a:t>Y – probability. </a:t>
+            </a:r>
+          </a:p>
+          <a:p>
+            <a:pPr lvl="1"/>
+            <a:r>
+              <a:rPr lang="en-US" dirty="0"/>
+              <a:t>X – time scale. </a:t>
+            </a:r>
+          </a:p>
+          <a:p>
+            <a:endParaRPr lang="en-US" dirty="0"/>
+          </a:p>
+        </p:txBody>
+      </p:sp>
+      <p:pic>
+        <p:nvPicPr>
+          <p:cNvPr id="4" name="Picture 3" descr="Kaplan–Meier Curve Explained Visually | Survival Analysis Made Easy">
+            <a:extLst>
+              <a:ext uri="{FF2B5EF4-FFF2-40B4-BE49-F238E27FC236}">
+                <a16:creationId xmlns:a16="http://schemas.microsoft.com/office/drawing/2014/main" id="{21987270-6A38-AB80-1D06-66B2D73F1A8C}"/>
+              </a:ext>
+            </a:extLst>
+          </p:cNvPr>
+          <p:cNvPicPr>
+            <a:picLocks noChangeAspect="1"/>
+          </p:cNvPicPr>
+          <p:nvPr/>
+        </p:nvPicPr>
+        <p:blipFill>
+          <a:blip r:embed="rId2"/>
+          <a:stretch>
+            <a:fillRect/>
+          </a:stretch>
+        </p:blipFill>
+        <p:spPr>
+          <a:xfrm>
+            <a:off x="444501" y="1853754"/>
+            <a:ext cx="7772400" cy="4371975"/>
+          </a:xfrm>
+          <a:prstGeom prst="rect">
+            <a:avLst/>
+          </a:prstGeom>
+        </p:spPr>
+      </p:pic>
+    </p:spTree>
+    <p:extLst>
+      <p:ext uri="{BB962C8B-B14F-4D97-AF65-F5344CB8AC3E}">
+        <p14:creationId xmlns:p14="http://schemas.microsoft.com/office/powerpoint/2010/main" val="853032451"/>
+      </p:ext>
+    </p:extLst>
+  </p:cSld>
+  <p:clrMapOvr>
+    <a:masterClrMapping/>
+  </p:clrMapOvr>
+</p:sld>
+</file>
+
+<file path=ppt/slides/slide12.xml><?xml version="1.0" encoding="utf-8"?>
 <p:sld xmlns:a="http://schemas.openxmlformats.org/drawingml/2006/main" xmlns:r="http://schemas.openxmlformats.org/officeDocument/2006/relationships" xmlns:p="http://schemas.openxmlformats.org/presentationml/2006/main">
   <p:cSld>
     <p:spTree>
@@ -4623,7 +4927,7 @@
 </p:sld>
 </file>
 
-<file path=ppt/slides/slide11.xml><?xml version="1.0" encoding="utf-8"?>
+<file path=ppt/slides/slide13.xml><?xml version="1.0" encoding="utf-8"?>
 <p:sld xmlns:a="http://schemas.openxmlformats.org/drawingml/2006/main" xmlns:r="http://schemas.openxmlformats.org/officeDocument/2006/relationships" xmlns:p="http://schemas.openxmlformats.org/presentationml/2006/main" show="0">
   <p:cSld>
     <p:spTree>
@@ -4709,7 +5013,7 @@
 </p:sld>
 </file>
 
-<file path=ppt/slides/slide12.xml><?xml version="1.0" encoding="utf-8"?>
+<file path=ppt/slides/slide14.xml><?xml version="1.0" encoding="utf-8"?>
 <p:sld xmlns:a="http://schemas.openxmlformats.org/drawingml/2006/main" xmlns:r="http://schemas.openxmlformats.org/officeDocument/2006/relationships" xmlns:p="http://schemas.openxmlformats.org/presentationml/2006/main">
   <p:cSld>
     <p:spTree>
@@ -4874,7 +5178,7 @@
 </p:sld>
 </file>
 
-<file path=ppt/slides/slide13.xml><?xml version="1.0" encoding="utf-8"?>
+<file path=ppt/slides/slide15.xml><?xml version="1.0" encoding="utf-8"?>
 <p:sld xmlns:a="http://schemas.openxmlformats.org/drawingml/2006/main" xmlns:r="http://schemas.openxmlformats.org/officeDocument/2006/relationships" xmlns:p="http://schemas.openxmlformats.org/presentationml/2006/main">
   <p:cSld>
     <p:spTree>
@@ -4934,7 +5238,7 @@
 </p:sld>
 </file>
 
-<file path=ppt/slides/slide14.xml><?xml version="1.0" encoding="utf-8"?>
+<file path=ppt/slides/slide16.xml><?xml version="1.0" encoding="utf-8"?>
 <p:sld xmlns:a="http://schemas.openxmlformats.org/drawingml/2006/main" xmlns:r="http://schemas.openxmlformats.org/officeDocument/2006/relationships" xmlns:p="http://schemas.openxmlformats.org/presentationml/2006/main">
   <p:cSld>
     <p:spTree>
@@ -5097,7 +5401,7 @@
 </p:sld>
 </file>
 
-<file path=ppt/slides/slide15.xml><?xml version="1.0" encoding="utf-8"?>
+<file path=ppt/slides/slide17.xml><?xml version="1.0" encoding="utf-8"?>
 <p:sld xmlns:a="http://schemas.openxmlformats.org/drawingml/2006/main" xmlns:r="http://schemas.openxmlformats.org/officeDocument/2006/relationships" xmlns:p="http://schemas.openxmlformats.org/presentationml/2006/main">
   <p:cSld>
     <p:spTree>
@@ -5177,6 +5481,12 @@
             <a:r>
               <a:rPr lang="en-US" dirty="0"/>
               <a:t>Data-&gt;model. </a:t>
+            </a:r>
+          </a:p>
+          <a:p>
+            <a:r>
+              <a:rPr lang="en-US" dirty="0"/>
+              <a:t>But first, we need to overcome…</a:t>
             </a:r>
           </a:p>
           <a:p>
@@ -5227,7 +5537,7 @@
 </p:sld>
 </file>
 
-<file path=ppt/slides/slide16.xml><?xml version="1.0" encoding="utf-8"?>
+<file path=ppt/slides/slide18.xml><?xml version="1.0" encoding="utf-8"?>
 <p:sld xmlns:a="http://schemas.openxmlformats.org/drawingml/2006/main" xmlns:r="http://schemas.openxmlformats.org/officeDocument/2006/relationships" xmlns:p="http://schemas.openxmlformats.org/presentationml/2006/main">
   <p:cSld>
     <p:spTree>
@@ -5424,7 +5734,7 @@
 </p:sld>
 </file>
 
-<file path=ppt/slides/slide17.xml><?xml version="1.0" encoding="utf-8"?>
+<file path=ppt/slides/slide19.xml><?xml version="1.0" encoding="utf-8"?>
 <p:sld xmlns:a="http://schemas.openxmlformats.org/drawingml/2006/main" xmlns:r="http://schemas.openxmlformats.org/officeDocument/2006/relationships" xmlns:p="http://schemas.openxmlformats.org/presentationml/2006/main">
   <p:cSld>
     <p:spTree>
@@ -5620,7 +5930,172 @@
 </p:sld>
 </file>
 
-<file path=ppt/slides/slide18.xml><?xml version="1.0" encoding="utf-8"?>
+<file path=ppt/slides/slide2.xml><?xml version="1.0" encoding="utf-8"?>
+<p:sld xmlns:a="http://schemas.openxmlformats.org/drawingml/2006/main" xmlns:r="http://schemas.openxmlformats.org/officeDocument/2006/relationships" xmlns:p="http://schemas.openxmlformats.org/presentationml/2006/main">
+  <p:cSld>
+    <p:spTree>
+      <p:nvGrpSpPr>
+        <p:cNvPr id="1" name=""/>
+        <p:cNvGrpSpPr/>
+        <p:nvPr/>
+      </p:nvGrpSpPr>
+      <p:grpSpPr>
+        <a:xfrm>
+          <a:off x="0" y="0"/>
+          <a:ext cx="0" cy="0"/>
+          <a:chOff x="0" y="0"/>
+          <a:chExt cx="0" cy="0"/>
+        </a:xfrm>
+      </p:grpSpPr>
+      <p:sp>
+        <p:nvSpPr>
+          <p:cNvPr id="2" name="Title 1">
+            <a:extLst>
+              <a:ext uri="{FF2B5EF4-FFF2-40B4-BE49-F238E27FC236}">
+                <a16:creationId xmlns:a16="http://schemas.microsoft.com/office/drawing/2014/main" id="{66A3FA87-BFE9-1741-44AE-698A049B7DBC}"/>
+              </a:ext>
+            </a:extLst>
+          </p:cNvPr>
+          <p:cNvSpPr>
+            <a:spLocks noGrp="1"/>
+          </p:cNvSpPr>
+          <p:nvPr>
+            <p:ph type="title"/>
+          </p:nvPr>
+        </p:nvSpPr>
+        <p:spPr/>
+        <p:txBody>
+          <a:bodyPr/>
+          <a:lstStyle/>
+          <a:p>
+            <a:r>
+              <a:rPr lang="en-US" dirty="0"/>
+              <a:t>Exam</a:t>
+            </a:r>
+          </a:p>
+        </p:txBody>
+      </p:sp>
+      <p:sp>
+        <p:nvSpPr>
+          <p:cNvPr id="3" name="Content Placeholder 2">
+            <a:extLst>
+              <a:ext uri="{FF2B5EF4-FFF2-40B4-BE49-F238E27FC236}">
+                <a16:creationId xmlns:a16="http://schemas.microsoft.com/office/drawing/2014/main" id="{3E8C6CE8-B391-0B70-92CF-EF117BA2FF2E}"/>
+              </a:ext>
+            </a:extLst>
+          </p:cNvPr>
+          <p:cNvSpPr>
+            <a:spLocks noGrp="1"/>
+          </p:cNvSpPr>
+          <p:nvPr>
+            <p:ph idx="1"/>
+          </p:nvPr>
+        </p:nvSpPr>
+        <p:spPr>
+          <a:xfrm>
+            <a:off x="1451579" y="2015732"/>
+            <a:ext cx="5205067" cy="3450613"/>
+          </a:xfrm>
+        </p:spPr>
+        <p:txBody>
+          <a:bodyPr/>
+          <a:lstStyle/>
+          <a:p>
+            <a:r>
+              <a:rPr lang="en-US" dirty="0"/>
+              <a:t>Overall good. </a:t>
+            </a:r>
+          </a:p>
+          <a:p>
+            <a:r>
+              <a:rPr lang="en-US" dirty="0"/>
+              <a:t>Comparing groups – need </a:t>
+            </a:r>
+            <a:r>
+              <a:rPr lang="en-US" dirty="0" err="1"/>
+              <a:t>anova</a:t>
+            </a:r>
+            <a:r>
+              <a:rPr lang="en-US" dirty="0"/>
+              <a:t> or similar.</a:t>
+            </a:r>
+          </a:p>
+          <a:p>
+            <a:pPr lvl="1"/>
+            <a:r>
+              <a:rPr lang="en-US" dirty="0"/>
+              <a:t>Mean difference or effect size isn’t enough.  </a:t>
+            </a:r>
+          </a:p>
+          <a:p>
+            <a:pPr lvl="1"/>
+            <a:r>
+              <a:rPr lang="en-US" dirty="0"/>
+              <a:t>With </a:t>
+            </a:r>
+            <a:r>
+              <a:rPr lang="en-US" dirty="0" err="1"/>
+              <a:t>anova</a:t>
+            </a:r>
+            <a:r>
+              <a:rPr lang="en-US" dirty="0"/>
+              <a:t>, </a:t>
+            </a:r>
+            <a:r>
+              <a:rPr lang="en-US" i="1" dirty="0"/>
+              <a:t>should </a:t>
+            </a:r>
+            <a:r>
+              <a:rPr lang="en-US" dirty="0"/>
+              <a:t>have a variance test first. </a:t>
+            </a:r>
+          </a:p>
+        </p:txBody>
+      </p:sp>
+      <p:pic>
+        <p:nvPicPr>
+          <p:cNvPr id="4" name="Picture 3">
+            <a:extLst>
+              <a:ext uri="{FF2B5EF4-FFF2-40B4-BE49-F238E27FC236}">
+                <a16:creationId xmlns:a16="http://schemas.microsoft.com/office/drawing/2014/main" id="{F981CBA2-B1BE-8580-A163-080431602261}"/>
+              </a:ext>
+            </a:extLst>
+          </p:cNvPr>
+          <p:cNvPicPr>
+            <a:picLocks noChangeAspect="1"/>
+          </p:cNvPicPr>
+          <p:nvPr/>
+        </p:nvPicPr>
+        <p:blipFill>
+          <a:blip r:embed="rId2"/>
+          <a:stretch>
+            <a:fillRect/>
+          </a:stretch>
+        </p:blipFill>
+        <p:spPr>
+          <a:xfrm>
+            <a:off x="6656646" y="1845472"/>
+            <a:ext cx="5325804" cy="4110827"/>
+          </a:xfrm>
+          <a:prstGeom prst="rect">
+            <a:avLst/>
+          </a:prstGeom>
+        </p:spPr>
+      </p:pic>
+    </p:spTree>
+    <p:extLst>
+      <p:ext uri="{BB962C8B-B14F-4D97-AF65-F5344CB8AC3E}">
+        <p14:creationId xmlns:p14="http://schemas.microsoft.com/office/powerpoint/2010/main" val="4058885138"/>
+      </p:ext>
+    </p:extLst>
+  </p:cSld>
+  <p:clrMapOvr>
+    <a:masterClrMapping/>
+  </p:clrMapOvr>
+</p:sld>
+</file>
+
+<file path=ppt/slides/slide20.xml><?xml version="1.0" encoding="utf-8"?>
 <p:sld xmlns:a="http://schemas.openxmlformats.org/drawingml/2006/main" xmlns:r="http://schemas.openxmlformats.org/officeDocument/2006/relationships" xmlns:p="http://schemas.openxmlformats.org/presentationml/2006/main">
   <p:cSld>
     <p:spTree>
@@ -5753,7 +6228,7 @@
 </p:sld>
 </file>
 
-<file path=ppt/slides/slide19.xml><?xml version="1.0" encoding="utf-8"?>
+<file path=ppt/slides/slide21.xml><?xml version="1.0" encoding="utf-8"?>
 <p:sld xmlns:a="http://schemas.openxmlformats.org/drawingml/2006/main" xmlns:r="http://schemas.openxmlformats.org/officeDocument/2006/relationships" xmlns:p="http://schemas.openxmlformats.org/presentationml/2006/main">
   <p:cSld>
     <p:spTree>
@@ -5816,8 +6291,8 @@
         </p:nvSpPr>
         <p:spPr>
           <a:xfrm>
-            <a:off x="1451579" y="2015732"/>
-            <a:ext cx="4801637" cy="3450613"/>
+            <a:off x="1451580" y="2015732"/>
+            <a:ext cx="3702920" cy="3450613"/>
           </a:xfrm>
         </p:spPr>
         <p:txBody>
@@ -5866,7 +6341,7 @@
         </p:blipFill>
         <p:spPr>
           <a:xfrm>
-            <a:off x="6253216" y="2015732"/>
+            <a:off x="5154499" y="1872222"/>
             <a:ext cx="5900355" cy="3737631"/>
           </a:xfrm>
           <a:prstGeom prst="rect">
@@ -5887,7 +6362,1312 @@
 </p:sld>
 </file>
 
-<file path=ppt/slides/slide2.xml><?xml version="1.0" encoding="utf-8"?>
+<file path=ppt/slides/slide22.xml><?xml version="1.0" encoding="utf-8"?>
+<p:sld xmlns:a="http://schemas.openxmlformats.org/drawingml/2006/main" xmlns:r="http://schemas.openxmlformats.org/officeDocument/2006/relationships" xmlns:p="http://schemas.openxmlformats.org/presentationml/2006/main">
+  <p:cSld>
+    <p:spTree>
+      <p:nvGrpSpPr>
+        <p:cNvPr id="1" name=""/>
+        <p:cNvGrpSpPr/>
+        <p:nvPr/>
+      </p:nvGrpSpPr>
+      <p:grpSpPr>
+        <a:xfrm>
+          <a:off x="0" y="0"/>
+          <a:ext cx="0" cy="0"/>
+          <a:chOff x="0" y="0"/>
+          <a:chExt cx="0" cy="0"/>
+        </a:xfrm>
+      </p:grpSpPr>
+      <p:sp>
+        <p:nvSpPr>
+          <p:cNvPr id="2" name="Title 1">
+            <a:extLst>
+              <a:ext uri="{FF2B5EF4-FFF2-40B4-BE49-F238E27FC236}">
+                <a16:creationId xmlns:a16="http://schemas.microsoft.com/office/drawing/2014/main" id="{983AAD23-E110-9FDA-156B-429E79FA8793}"/>
+              </a:ext>
+            </a:extLst>
+          </p:cNvPr>
+          <p:cNvSpPr>
+            <a:spLocks noGrp="1"/>
+          </p:cNvSpPr>
+          <p:nvPr>
+            <p:ph type="title"/>
+          </p:nvPr>
+        </p:nvSpPr>
+        <p:spPr/>
+        <p:txBody>
+          <a:bodyPr/>
+          <a:lstStyle/>
+          <a:p>
+            <a:r>
+              <a:rPr lang="en-US" dirty="0"/>
+              <a:t>Remaining Lifetime</a:t>
+            </a:r>
+          </a:p>
+        </p:txBody>
+      </p:sp>
+      <p:sp>
+        <p:nvSpPr>
+          <p:cNvPr id="3" name="Content Placeholder 2">
+            <a:extLst>
+              <a:ext uri="{FF2B5EF4-FFF2-40B4-BE49-F238E27FC236}">
+                <a16:creationId xmlns:a16="http://schemas.microsoft.com/office/drawing/2014/main" id="{3D56C3F1-1278-9317-65F7-B821C0041B02}"/>
+              </a:ext>
+            </a:extLst>
+          </p:cNvPr>
+          <p:cNvSpPr>
+            <a:spLocks noGrp="1"/>
+          </p:cNvSpPr>
+          <p:nvPr>
+            <p:ph idx="1"/>
+          </p:nvPr>
+        </p:nvSpPr>
+        <p:spPr/>
+        <p:txBody>
+          <a:bodyPr/>
+          <a:lstStyle/>
+          <a:p>
+            <a:r>
+              <a:rPr lang="en-US" dirty="0"/>
+              <a:t>We can generate an estimation of remaining lifetime. </a:t>
+            </a:r>
+          </a:p>
+          <a:p>
+            <a:pPr lvl="1"/>
+            <a:r>
+              <a:rPr lang="en-US" dirty="0"/>
+              <a:t>Given that you’ve made it this far, how long do you have left? </a:t>
+            </a:r>
+          </a:p>
+        </p:txBody>
+      </p:sp>
+    </p:spTree>
+    <p:extLst>
+      <p:ext uri="{BB962C8B-B14F-4D97-AF65-F5344CB8AC3E}">
+        <p14:creationId xmlns:p14="http://schemas.microsoft.com/office/powerpoint/2010/main" val="3187493989"/>
+      </p:ext>
+    </p:extLst>
+  </p:cSld>
+  <p:clrMapOvr>
+    <a:masterClrMapping/>
+  </p:clrMapOvr>
+</p:sld>
+</file>
+
+<file path=ppt/slides/slide23.xml><?xml version="1.0" encoding="utf-8"?>
+<p:sld xmlns:a="http://schemas.openxmlformats.org/drawingml/2006/main" xmlns:r="http://schemas.openxmlformats.org/officeDocument/2006/relationships" xmlns:p="http://schemas.openxmlformats.org/presentationml/2006/main">
+  <p:cSld>
+    <p:spTree>
+      <p:nvGrpSpPr>
+        <p:cNvPr id="1" name=""/>
+        <p:cNvGrpSpPr/>
+        <p:nvPr/>
+      </p:nvGrpSpPr>
+      <p:grpSpPr>
+        <a:xfrm>
+          <a:off x="0" y="0"/>
+          <a:ext cx="0" cy="0"/>
+          <a:chOff x="0" y="0"/>
+          <a:chExt cx="0" cy="0"/>
+        </a:xfrm>
+      </p:grpSpPr>
+      <p:sp>
+        <p:nvSpPr>
+          <p:cNvPr id="2" name="Title 1">
+            <a:extLst>
+              <a:ext uri="{FF2B5EF4-FFF2-40B4-BE49-F238E27FC236}">
+                <a16:creationId xmlns:a16="http://schemas.microsoft.com/office/drawing/2014/main" id="{A0233FF3-C831-FB6B-6BE6-33E196AC9283}"/>
+              </a:ext>
+            </a:extLst>
+          </p:cNvPr>
+          <p:cNvSpPr>
+            <a:spLocks noGrp="1"/>
+          </p:cNvSpPr>
+          <p:nvPr>
+            <p:ph type="title"/>
+          </p:nvPr>
+        </p:nvSpPr>
+        <p:spPr/>
+        <p:txBody>
+          <a:bodyPr/>
+          <a:lstStyle/>
+          <a:p>
+            <a:r>
+              <a:rPr lang="en-US" dirty="0"/>
+              <a:t>Confidence Intervals and Simulation</a:t>
+            </a:r>
+          </a:p>
+        </p:txBody>
+      </p:sp>
+      <p:sp>
+        <p:nvSpPr>
+          <p:cNvPr id="3" name="Content Placeholder 2">
+            <a:extLst>
+              <a:ext uri="{FF2B5EF4-FFF2-40B4-BE49-F238E27FC236}">
+                <a16:creationId xmlns:a16="http://schemas.microsoft.com/office/drawing/2014/main" id="{AD9F8DBC-D6B5-AE80-5E67-A4262901F2AB}"/>
+              </a:ext>
+            </a:extLst>
+          </p:cNvPr>
+          <p:cNvSpPr>
+            <a:spLocks noGrp="1"/>
+          </p:cNvSpPr>
+          <p:nvPr>
+            <p:ph idx="1"/>
+          </p:nvPr>
+        </p:nvSpPr>
+        <p:spPr>
+          <a:xfrm>
+            <a:off x="101600" y="1853754"/>
+            <a:ext cx="6151617" cy="3988246"/>
+          </a:xfrm>
+        </p:spPr>
+        <p:txBody>
+          <a:bodyPr>
+            <a:normAutofit/>
+          </a:bodyPr>
+          <a:lstStyle/>
+          <a:p>
+            <a:r>
+              <a:rPr lang="en-US" dirty="0"/>
+              <a:t>Survival is, obviously, something where we don’t have all the info. </a:t>
+            </a:r>
+          </a:p>
+          <a:p>
+            <a:r>
+              <a:rPr lang="en-US" dirty="0"/>
+              <a:t>Our survival projections have error. </a:t>
+            </a:r>
+          </a:p>
+          <a:p>
+            <a:r>
+              <a:rPr lang="en-US" dirty="0"/>
+              <a:t>We can show the confidence with CI. </a:t>
+            </a:r>
+          </a:p>
+          <a:p>
+            <a:r>
+              <a:rPr lang="en-US" dirty="0"/>
+              <a:t>We can generate CI via monte </a:t>
+            </a:r>
+            <a:r>
+              <a:rPr lang="en-US" dirty="0" err="1"/>
+              <a:t>carlo</a:t>
+            </a:r>
+            <a:r>
+              <a:rPr lang="en-US" dirty="0"/>
+              <a:t> processes. </a:t>
+            </a:r>
+          </a:p>
+          <a:p>
+            <a:pPr lvl="1"/>
+            <a:r>
+              <a:rPr lang="en-US" dirty="0"/>
+              <a:t>Take the data, resample with replacement, calculate survival. </a:t>
+            </a:r>
+          </a:p>
+          <a:p>
+            <a:pPr lvl="1"/>
+            <a:r>
+              <a:rPr lang="en-US" dirty="0"/>
+              <a:t>Do many times, calculate where 99/95/90% of results lie. </a:t>
+            </a:r>
+          </a:p>
+        </p:txBody>
+      </p:sp>
+      <p:pic>
+        <p:nvPicPr>
+          <p:cNvPr id="4" name="Picture 3">
+            <a:extLst>
+              <a:ext uri="{FF2B5EF4-FFF2-40B4-BE49-F238E27FC236}">
+                <a16:creationId xmlns:a16="http://schemas.microsoft.com/office/drawing/2014/main" id="{4BDFFD3F-A1D1-AE9C-FDD0-38DC8D762B3D}"/>
+              </a:ext>
+            </a:extLst>
+          </p:cNvPr>
+          <p:cNvPicPr>
+            <a:picLocks noChangeAspect="1"/>
+          </p:cNvPicPr>
+          <p:nvPr/>
+        </p:nvPicPr>
+        <p:blipFill>
+          <a:blip r:embed="rId2"/>
+          <a:stretch>
+            <a:fillRect/>
+          </a:stretch>
+        </p:blipFill>
+        <p:spPr>
+          <a:xfrm>
+            <a:off x="6253216" y="1493138"/>
+            <a:ext cx="5943600" cy="4495800"/>
+          </a:xfrm>
+          <a:prstGeom prst="rect">
+            <a:avLst/>
+          </a:prstGeom>
+        </p:spPr>
+      </p:pic>
+    </p:spTree>
+    <p:extLst>
+      <p:ext uri="{BB962C8B-B14F-4D97-AF65-F5344CB8AC3E}">
+        <p14:creationId xmlns:p14="http://schemas.microsoft.com/office/powerpoint/2010/main" val="3767739599"/>
+      </p:ext>
+    </p:extLst>
+  </p:cSld>
+  <p:clrMapOvr>
+    <a:masterClrMapping/>
+  </p:clrMapOvr>
+</p:sld>
+</file>
+
+<file path=ppt/slides/slide24.xml><?xml version="1.0" encoding="utf-8"?>
+<p:sld xmlns:a="http://schemas.openxmlformats.org/drawingml/2006/main" xmlns:r="http://schemas.openxmlformats.org/officeDocument/2006/relationships" xmlns:p="http://schemas.openxmlformats.org/presentationml/2006/main">
+  <p:cSld>
+    <p:spTree>
+      <p:nvGrpSpPr>
+        <p:cNvPr id="1" name=""/>
+        <p:cNvGrpSpPr/>
+        <p:nvPr/>
+      </p:nvGrpSpPr>
+      <p:grpSpPr>
+        <a:xfrm>
+          <a:off x="0" y="0"/>
+          <a:ext cx="0" cy="0"/>
+          <a:chOff x="0" y="0"/>
+          <a:chExt cx="0" cy="0"/>
+        </a:xfrm>
+      </p:grpSpPr>
+      <p:sp>
+        <p:nvSpPr>
+          <p:cNvPr id="2" name="Title 1">
+            <a:extLst>
+              <a:ext uri="{FF2B5EF4-FFF2-40B4-BE49-F238E27FC236}">
+                <a16:creationId xmlns:a16="http://schemas.microsoft.com/office/drawing/2014/main" id="{6DA058FB-586A-C07F-B889-35D9E1C3B457}"/>
+              </a:ext>
+            </a:extLst>
+          </p:cNvPr>
+          <p:cNvSpPr>
+            <a:spLocks noGrp="1"/>
+          </p:cNvSpPr>
+          <p:nvPr>
+            <p:ph type="title"/>
+          </p:nvPr>
+        </p:nvSpPr>
+        <p:spPr/>
+        <p:txBody>
+          <a:bodyPr/>
+          <a:lstStyle/>
+          <a:p>
+            <a:r>
+              <a:rPr lang="en-US" dirty="0"/>
+              <a:t>Cohort Comparisons</a:t>
+            </a:r>
+          </a:p>
+        </p:txBody>
+      </p:sp>
+      <p:sp>
+        <p:nvSpPr>
+          <p:cNvPr id="3" name="Content Placeholder 2">
+            <a:extLst>
+              <a:ext uri="{FF2B5EF4-FFF2-40B4-BE49-F238E27FC236}">
+                <a16:creationId xmlns:a16="http://schemas.microsoft.com/office/drawing/2014/main" id="{5A234E1E-A125-E6EA-17A1-965849055CC6}"/>
+              </a:ext>
+            </a:extLst>
+          </p:cNvPr>
+          <p:cNvSpPr>
+            <a:spLocks noGrp="1"/>
+          </p:cNvSpPr>
+          <p:nvPr>
+            <p:ph idx="1"/>
+          </p:nvPr>
+        </p:nvSpPr>
+        <p:spPr>
+          <a:xfrm>
+            <a:off x="5261578" y="2015732"/>
+            <a:ext cx="5793275" cy="3450613"/>
+          </a:xfrm>
+        </p:spPr>
+        <p:txBody>
+          <a:bodyPr/>
+          <a:lstStyle/>
+          <a:p>
+            <a:r>
+              <a:rPr lang="en-US" dirty="0"/>
+              <a:t>These types of lifetime projections are often useful with comparing cohorts. </a:t>
+            </a:r>
+          </a:p>
+          <a:p>
+            <a:r>
+              <a:rPr lang="en-US" dirty="0"/>
+              <a:t>We can do this by splitting data in prep and doing one set of calculations for each cohort. </a:t>
+            </a:r>
+          </a:p>
+          <a:p>
+            <a:r>
+              <a:rPr lang="en-US" dirty="0"/>
+              <a:t>If we are comparing two cohorts, these two seem to be different…. </a:t>
+            </a:r>
+            <a:r>
+              <a:rPr lang="en-US"/>
+              <a:t>But are they?</a:t>
+            </a:r>
+          </a:p>
+        </p:txBody>
+      </p:sp>
+      <p:pic>
+        <p:nvPicPr>
+          <p:cNvPr id="4" name="Picture 3">
+            <a:extLst>
+              <a:ext uri="{FF2B5EF4-FFF2-40B4-BE49-F238E27FC236}">
+                <a16:creationId xmlns:a16="http://schemas.microsoft.com/office/drawing/2014/main" id="{BE2BA802-F08D-E418-0235-3F18345339EA}"/>
+              </a:ext>
+            </a:extLst>
+          </p:cNvPr>
+          <p:cNvPicPr>
+            <a:picLocks noChangeAspect="1"/>
+          </p:cNvPicPr>
+          <p:nvPr/>
+        </p:nvPicPr>
+        <p:blipFill>
+          <a:blip r:embed="rId2"/>
+          <a:stretch>
+            <a:fillRect/>
+          </a:stretch>
+        </p:blipFill>
+        <p:spPr>
+          <a:xfrm>
+            <a:off x="1451579" y="1969388"/>
+            <a:ext cx="3810000" cy="3543300"/>
+          </a:xfrm>
+          <a:prstGeom prst="rect">
+            <a:avLst/>
+          </a:prstGeom>
+        </p:spPr>
+      </p:pic>
+    </p:spTree>
+    <p:extLst>
+      <p:ext uri="{BB962C8B-B14F-4D97-AF65-F5344CB8AC3E}">
+        <p14:creationId xmlns:p14="http://schemas.microsoft.com/office/powerpoint/2010/main" val="3861675422"/>
+      </p:ext>
+    </p:extLst>
+  </p:cSld>
+  <p:clrMapOvr>
+    <a:masterClrMapping/>
+  </p:clrMapOvr>
+</p:sld>
+</file>
+
+<file path=ppt/slides/slide25.xml><?xml version="1.0" encoding="utf-8"?>
+<p:sld xmlns:a="http://schemas.openxmlformats.org/drawingml/2006/main" xmlns:r="http://schemas.openxmlformats.org/officeDocument/2006/relationships" xmlns:p="http://schemas.openxmlformats.org/presentationml/2006/main">
+  <p:cSld>
+    <p:spTree>
+      <p:nvGrpSpPr>
+        <p:cNvPr id="1" name=""/>
+        <p:cNvGrpSpPr/>
+        <p:nvPr/>
+      </p:nvGrpSpPr>
+      <p:grpSpPr>
+        <a:xfrm>
+          <a:off x="0" y="0"/>
+          <a:ext cx="0" cy="0"/>
+          <a:chOff x="0" y="0"/>
+          <a:chExt cx="0" cy="0"/>
+        </a:xfrm>
+      </p:grpSpPr>
+      <p:sp>
+        <p:nvSpPr>
+          <p:cNvPr id="2" name="Title 1">
+            <a:extLst>
+              <a:ext uri="{FF2B5EF4-FFF2-40B4-BE49-F238E27FC236}">
+                <a16:creationId xmlns:a16="http://schemas.microsoft.com/office/drawing/2014/main" id="{391314BC-5708-A415-D43B-7A2C628CA00D}"/>
+              </a:ext>
+            </a:extLst>
+          </p:cNvPr>
+          <p:cNvSpPr>
+            <a:spLocks noGrp="1"/>
+          </p:cNvSpPr>
+          <p:nvPr>
+            <p:ph type="title"/>
+          </p:nvPr>
+        </p:nvSpPr>
+        <p:spPr/>
+        <p:txBody>
+          <a:bodyPr/>
+          <a:lstStyle/>
+          <a:p>
+            <a:r>
+              <a:rPr lang="en-US" dirty="0"/>
+              <a:t>Application – Log-Rank Test</a:t>
+            </a:r>
+          </a:p>
+        </p:txBody>
+      </p:sp>
+      <p:sp>
+        <p:nvSpPr>
+          <p:cNvPr id="3" name="Content Placeholder 2">
+            <a:extLst>
+              <a:ext uri="{FF2B5EF4-FFF2-40B4-BE49-F238E27FC236}">
+                <a16:creationId xmlns:a16="http://schemas.microsoft.com/office/drawing/2014/main" id="{8B953BF6-4F6C-59B7-65B0-293C19970924}"/>
+              </a:ext>
+            </a:extLst>
+          </p:cNvPr>
+          <p:cNvSpPr>
+            <a:spLocks noGrp="1"/>
+          </p:cNvSpPr>
+          <p:nvPr>
+            <p:ph idx="1"/>
+          </p:nvPr>
+        </p:nvSpPr>
+        <p:spPr>
+          <a:xfrm>
+            <a:off x="6366179" y="2015732"/>
+            <a:ext cx="5174179" cy="4037749"/>
+          </a:xfrm>
+        </p:spPr>
+        <p:txBody>
+          <a:bodyPr>
+            <a:normAutofit/>
+          </a:bodyPr>
+          <a:lstStyle/>
+          <a:p>
+            <a:r>
+              <a:rPr lang="en-US" dirty="0"/>
+              <a:t>A log-rank test is roughly analogous to a hypothesis test for a distribution. </a:t>
+            </a:r>
+          </a:p>
+          <a:p>
+            <a:pPr lvl="1"/>
+            <a:r>
+              <a:rPr lang="en-US" dirty="0"/>
+              <a:t>Do these two samples appear to come from the same population. </a:t>
+            </a:r>
+          </a:p>
+          <a:p>
+            <a:pPr lvl="1"/>
+            <a:r>
+              <a:rPr lang="en-US" dirty="0"/>
+              <a:t>Null hypothesis: The groups have the same survival function over time.</a:t>
+            </a:r>
+          </a:p>
+          <a:p>
+            <a:pPr lvl="1"/>
+            <a:r>
+              <a:rPr lang="en-US" dirty="0"/>
+              <a:t>Alternative hypothesis: At least one group has a different survival function.</a:t>
+            </a:r>
+          </a:p>
+          <a:p>
+            <a:r>
+              <a:rPr lang="en-US" dirty="0"/>
+              <a:t>E.g. are employees quitting this </a:t>
+            </a:r>
+            <a:r>
+              <a:rPr lang="en-US" dirty="0" err="1"/>
+              <a:t>McD</a:t>
+            </a:r>
+            <a:r>
+              <a:rPr lang="en-US" dirty="0"/>
+              <a:t> for some reason, or just normal turnover?</a:t>
+            </a:r>
+          </a:p>
+        </p:txBody>
+      </p:sp>
+      <p:pic>
+        <p:nvPicPr>
+          <p:cNvPr id="4" name="Picture 3" descr="Log Rank Test Hypotheses">
+            <a:extLst>
+              <a:ext uri="{FF2B5EF4-FFF2-40B4-BE49-F238E27FC236}">
+                <a16:creationId xmlns:a16="http://schemas.microsoft.com/office/drawing/2014/main" id="{D6ECC6C6-7F86-40F8-B469-1F2DD1F630EB}"/>
+              </a:ext>
+            </a:extLst>
+          </p:cNvPr>
+          <p:cNvPicPr>
+            <a:picLocks noChangeAspect="1"/>
+          </p:cNvPicPr>
+          <p:nvPr/>
+        </p:nvPicPr>
+        <p:blipFill>
+          <a:blip r:embed="rId2"/>
+          <a:stretch>
+            <a:fillRect/>
+          </a:stretch>
+        </p:blipFill>
+        <p:spPr>
+          <a:xfrm>
+            <a:off x="218745" y="2185147"/>
+            <a:ext cx="6147435" cy="3293898"/>
+          </a:xfrm>
+          <a:prstGeom prst="rect">
+            <a:avLst/>
+          </a:prstGeom>
+        </p:spPr>
+      </p:pic>
+    </p:spTree>
+    <p:extLst>
+      <p:ext uri="{BB962C8B-B14F-4D97-AF65-F5344CB8AC3E}">
+        <p14:creationId xmlns:p14="http://schemas.microsoft.com/office/powerpoint/2010/main" val="380687327"/>
+      </p:ext>
+    </p:extLst>
+  </p:cSld>
+  <p:clrMapOvr>
+    <a:masterClrMapping/>
+  </p:clrMapOvr>
+</p:sld>
+</file>
+
+<file path=ppt/slides/slide26.xml><?xml version="1.0" encoding="utf-8"?>
+<p:sld xmlns:a="http://schemas.openxmlformats.org/drawingml/2006/main" xmlns:r="http://schemas.openxmlformats.org/officeDocument/2006/relationships" xmlns:p="http://schemas.openxmlformats.org/presentationml/2006/main">
+  <p:cSld>
+    <p:spTree>
+      <p:nvGrpSpPr>
+        <p:cNvPr id="1" name=""/>
+        <p:cNvGrpSpPr/>
+        <p:nvPr/>
+      </p:nvGrpSpPr>
+      <p:grpSpPr>
+        <a:xfrm>
+          <a:off x="0" y="0"/>
+          <a:ext cx="0" cy="0"/>
+          <a:chOff x="0" y="0"/>
+          <a:chExt cx="0" cy="0"/>
+        </a:xfrm>
+      </p:grpSpPr>
+      <p:sp>
+        <p:nvSpPr>
+          <p:cNvPr id="2" name="Title 1">
+            <a:extLst>
+              <a:ext uri="{FF2B5EF4-FFF2-40B4-BE49-F238E27FC236}">
+                <a16:creationId xmlns:a16="http://schemas.microsoft.com/office/drawing/2014/main" id="{033CE7EE-720D-296D-84F9-36CD40C810DD}"/>
+              </a:ext>
+            </a:extLst>
+          </p:cNvPr>
+          <p:cNvSpPr>
+            <a:spLocks noGrp="1"/>
+          </p:cNvSpPr>
+          <p:nvPr>
+            <p:ph type="title"/>
+          </p:nvPr>
+        </p:nvSpPr>
+        <p:spPr>
+          <a:xfrm>
+            <a:off x="5727700" y="804519"/>
+            <a:ext cx="5327154" cy="1049235"/>
+          </a:xfrm>
+        </p:spPr>
+        <p:txBody>
+          <a:bodyPr/>
+          <a:lstStyle/>
+          <a:p>
+            <a:r>
+              <a:rPr lang="en-US" dirty="0"/>
+              <a:t>Log Ranking</a:t>
+            </a:r>
+          </a:p>
+        </p:txBody>
+      </p:sp>
+      <p:sp>
+        <p:nvSpPr>
+          <p:cNvPr id="3" name="Content Placeholder 2">
+            <a:extLst>
+              <a:ext uri="{FF2B5EF4-FFF2-40B4-BE49-F238E27FC236}">
+                <a16:creationId xmlns:a16="http://schemas.microsoft.com/office/drawing/2014/main" id="{DB612A76-1626-9593-F256-492F61104F37}"/>
+              </a:ext>
+            </a:extLst>
+          </p:cNvPr>
+          <p:cNvSpPr>
+            <a:spLocks noGrp="1"/>
+          </p:cNvSpPr>
+          <p:nvPr>
+            <p:ph idx="1"/>
+          </p:nvPr>
+        </p:nvSpPr>
+        <p:spPr>
+          <a:xfrm>
+            <a:off x="5582894" y="2015732"/>
+            <a:ext cx="6520206" cy="4037749"/>
+          </a:xfrm>
+        </p:spPr>
+        <p:txBody>
+          <a:bodyPr/>
+          <a:lstStyle/>
+          <a:p>
+            <a:r>
+              <a:rPr lang="en-US" dirty="0"/>
+              <a:t>We don’t need to worry about implementation of this. </a:t>
+            </a:r>
+          </a:p>
+          <a:p>
+            <a:r>
+              <a:rPr lang="en-US" dirty="0"/>
+              <a:t>Similar in concept to chi2 – diff from expectation. </a:t>
+            </a:r>
+          </a:p>
+          <a:p>
+            <a:r>
+              <a:rPr lang="en-US" dirty="0"/>
+              <a:t>The final p-value check is the same as Chi2:</a:t>
+            </a:r>
+          </a:p>
+          <a:p>
+            <a:pPr lvl="1"/>
+            <a:r>
+              <a:rPr lang="en-US" dirty="0"/>
+              <a:t>The difference from expectation is calculated differently. </a:t>
+            </a:r>
+          </a:p>
+          <a:p>
+            <a:pPr lvl="1"/>
+            <a:r>
+              <a:rPr lang="en-US" dirty="0"/>
+              <a:t>The idea is identical – quantification of diff. </a:t>
+            </a:r>
+          </a:p>
+          <a:p>
+            <a:r>
+              <a:rPr lang="en-US" dirty="0"/>
+              <a:t>If this big of a difference rarely (low p) happens randomly, then there is probably a difference in the datasets. </a:t>
+            </a:r>
+          </a:p>
+          <a:p>
+            <a:r>
+              <a:rPr lang="en-US" dirty="0"/>
+              <a:t>Other options like </a:t>
+            </a:r>
+            <a:r>
+              <a:rPr lang="en-CA" i="1" dirty="0"/>
+              <a:t>Wilcoxon </a:t>
+            </a:r>
+            <a:endParaRPr lang="en-US" dirty="0"/>
+          </a:p>
+        </p:txBody>
+      </p:sp>
+      <p:pic>
+        <p:nvPicPr>
+          <p:cNvPr id="4" name="Picture 3">
+            <a:extLst>
+              <a:ext uri="{FF2B5EF4-FFF2-40B4-BE49-F238E27FC236}">
+                <a16:creationId xmlns:a16="http://schemas.microsoft.com/office/drawing/2014/main" id="{24F1FFF9-081F-C832-F354-64C078B1B48E}"/>
+              </a:ext>
+            </a:extLst>
+          </p:cNvPr>
+          <p:cNvPicPr>
+            <a:picLocks noChangeAspect="1"/>
+          </p:cNvPicPr>
+          <p:nvPr/>
+        </p:nvPicPr>
+        <p:blipFill>
+          <a:blip r:embed="rId2"/>
+          <a:stretch>
+            <a:fillRect/>
+          </a:stretch>
+        </p:blipFill>
+        <p:spPr>
+          <a:xfrm>
+            <a:off x="0" y="0"/>
+            <a:ext cx="5582894" cy="6858000"/>
+          </a:xfrm>
+          <a:prstGeom prst="rect">
+            <a:avLst/>
+          </a:prstGeom>
+        </p:spPr>
+      </p:pic>
+    </p:spTree>
+    <p:extLst>
+      <p:ext uri="{BB962C8B-B14F-4D97-AF65-F5344CB8AC3E}">
+        <p14:creationId xmlns:p14="http://schemas.microsoft.com/office/powerpoint/2010/main" val="4255244021"/>
+      </p:ext>
+    </p:extLst>
+  </p:cSld>
+  <p:clrMapOvr>
+    <a:masterClrMapping/>
+  </p:clrMapOvr>
+</p:sld>
+</file>
+
+<file path=ppt/slides/slide27.xml><?xml version="1.0" encoding="utf-8"?>
+<p:sld xmlns:a="http://schemas.openxmlformats.org/drawingml/2006/main" xmlns:r="http://schemas.openxmlformats.org/officeDocument/2006/relationships" xmlns:p="http://schemas.openxmlformats.org/presentationml/2006/main">
+  <p:cSld>
+    <p:spTree>
+      <p:nvGrpSpPr>
+        <p:cNvPr id="1" name=""/>
+        <p:cNvGrpSpPr/>
+        <p:nvPr/>
+      </p:nvGrpSpPr>
+      <p:grpSpPr>
+        <a:xfrm>
+          <a:off x="0" y="0"/>
+          <a:ext cx="0" cy="0"/>
+          <a:chOff x="0" y="0"/>
+          <a:chExt cx="0" cy="0"/>
+        </a:xfrm>
+      </p:grpSpPr>
+      <p:sp>
+        <p:nvSpPr>
+          <p:cNvPr id="2" name="Title 1">
+            <a:extLst>
+              <a:ext uri="{FF2B5EF4-FFF2-40B4-BE49-F238E27FC236}">
+                <a16:creationId xmlns:a16="http://schemas.microsoft.com/office/drawing/2014/main" id="{AF6F2850-6DB3-9F2A-88FD-6E4D70498472}"/>
+              </a:ext>
+            </a:extLst>
+          </p:cNvPr>
+          <p:cNvSpPr>
+            <a:spLocks noGrp="1"/>
+          </p:cNvSpPr>
+          <p:nvPr>
+            <p:ph type="title"/>
+          </p:nvPr>
+        </p:nvSpPr>
+        <p:spPr/>
+        <p:txBody>
+          <a:bodyPr/>
+          <a:lstStyle/>
+          <a:p>
+            <a:r>
+              <a:rPr lang="en-US" dirty="0"/>
+              <a:t>Log-Rank Usage</a:t>
+            </a:r>
+          </a:p>
+        </p:txBody>
+      </p:sp>
+      <p:sp>
+        <p:nvSpPr>
+          <p:cNvPr id="3" name="Content Placeholder 2">
+            <a:extLst>
+              <a:ext uri="{FF2B5EF4-FFF2-40B4-BE49-F238E27FC236}">
+                <a16:creationId xmlns:a16="http://schemas.microsoft.com/office/drawing/2014/main" id="{5B181DE7-1AEF-2635-5E82-88B42BC5B32F}"/>
+              </a:ext>
+            </a:extLst>
+          </p:cNvPr>
+          <p:cNvSpPr>
+            <a:spLocks noGrp="1"/>
+          </p:cNvSpPr>
+          <p:nvPr>
+            <p:ph idx="1"/>
+          </p:nvPr>
+        </p:nvSpPr>
+        <p:spPr>
+          <a:xfrm>
+            <a:off x="469900" y="2015732"/>
+            <a:ext cx="5404946" cy="3450613"/>
+          </a:xfrm>
+        </p:spPr>
+        <p:txBody>
+          <a:bodyPr/>
+          <a:lstStyle/>
+          <a:p>
+            <a:r>
+              <a:rPr lang="en-US" dirty="0"/>
+              <a:t>Performing a log-rank test is relatively simple. </a:t>
+            </a:r>
+          </a:p>
+          <a:p>
+            <a:r>
+              <a:rPr lang="en-US" dirty="0"/>
+              <a:t>Assumptions:</a:t>
+            </a:r>
+          </a:p>
+          <a:p>
+            <a:pPr lvl="1"/>
+            <a:r>
+              <a:rPr lang="en-US" dirty="0"/>
+              <a:t>Events are independent. </a:t>
+            </a:r>
+          </a:p>
+          <a:p>
+            <a:pPr lvl="1"/>
+            <a:r>
+              <a:rPr lang="en-US" dirty="0"/>
+              <a:t>Events over time are similar between groups.</a:t>
+            </a:r>
+          </a:p>
+          <a:p>
+            <a:pPr lvl="1"/>
+            <a:r>
+              <a:rPr lang="en-US" dirty="0"/>
+              <a:t>No/low crossing – if which survives better switches after the start, may </a:t>
+            </a:r>
+            <a:r>
+              <a:rPr lang="en-US"/>
+              <a:t>lower accuracy. </a:t>
+            </a:r>
+            <a:endParaRPr lang="en-US" dirty="0"/>
+          </a:p>
+          <a:p>
+            <a:r>
+              <a:rPr lang="en-US" dirty="0"/>
+              <a:t>We must provide the data as two groups of times and events. </a:t>
+            </a:r>
+          </a:p>
+        </p:txBody>
+      </p:sp>
+      <p:pic>
+        <p:nvPicPr>
+          <p:cNvPr id="5" name="Picture 4">
+            <a:extLst>
+              <a:ext uri="{FF2B5EF4-FFF2-40B4-BE49-F238E27FC236}">
+                <a16:creationId xmlns:a16="http://schemas.microsoft.com/office/drawing/2014/main" id="{4933F0DB-2FCE-FF8B-7C53-CE091344E58E}"/>
+              </a:ext>
+            </a:extLst>
+          </p:cNvPr>
+          <p:cNvPicPr>
+            <a:picLocks noChangeAspect="1"/>
+          </p:cNvPicPr>
+          <p:nvPr/>
+        </p:nvPicPr>
+        <p:blipFill>
+          <a:blip r:embed="rId2"/>
+          <a:stretch>
+            <a:fillRect/>
+          </a:stretch>
+        </p:blipFill>
+        <p:spPr>
+          <a:xfrm>
+            <a:off x="5874845" y="804519"/>
+            <a:ext cx="6223000" cy="5626100"/>
+          </a:xfrm>
+          <a:prstGeom prst="rect">
+            <a:avLst/>
+          </a:prstGeom>
+        </p:spPr>
+      </p:pic>
+    </p:spTree>
+    <p:extLst>
+      <p:ext uri="{BB962C8B-B14F-4D97-AF65-F5344CB8AC3E}">
+        <p14:creationId xmlns:p14="http://schemas.microsoft.com/office/powerpoint/2010/main" val="1943809997"/>
+      </p:ext>
+    </p:extLst>
+  </p:cSld>
+  <p:clrMapOvr>
+    <a:masterClrMapping/>
+  </p:clrMapOvr>
+</p:sld>
+</file>
+
+<file path=ppt/slides/slide28.xml><?xml version="1.0" encoding="utf-8"?>
+<p:sld xmlns:a="http://schemas.openxmlformats.org/drawingml/2006/main" xmlns:r="http://schemas.openxmlformats.org/officeDocument/2006/relationships" xmlns:p="http://schemas.openxmlformats.org/presentationml/2006/main">
+  <p:cSld>
+    <p:spTree>
+      <p:nvGrpSpPr>
+        <p:cNvPr id="1" name=""/>
+        <p:cNvGrpSpPr/>
+        <p:nvPr/>
+      </p:nvGrpSpPr>
+      <p:grpSpPr>
+        <a:xfrm>
+          <a:off x="0" y="0"/>
+          <a:ext cx="0" cy="0"/>
+          <a:chOff x="0" y="0"/>
+          <a:chExt cx="0" cy="0"/>
+        </a:xfrm>
+      </p:grpSpPr>
+      <p:sp>
+        <p:nvSpPr>
+          <p:cNvPr id="2" name="Title 1">
+            <a:extLst>
+              <a:ext uri="{FF2B5EF4-FFF2-40B4-BE49-F238E27FC236}">
+                <a16:creationId xmlns:a16="http://schemas.microsoft.com/office/drawing/2014/main" id="{FC85C0F8-A5B9-1B8B-0FB8-AC737FB54B8A}"/>
+              </a:ext>
+            </a:extLst>
+          </p:cNvPr>
+          <p:cNvSpPr>
+            <a:spLocks noGrp="1"/>
+          </p:cNvSpPr>
+          <p:nvPr>
+            <p:ph type="title"/>
+          </p:nvPr>
+        </p:nvSpPr>
+        <p:spPr/>
+        <p:txBody>
+          <a:bodyPr/>
+          <a:lstStyle/>
+          <a:p>
+            <a:r>
+              <a:rPr lang="en-US" dirty="0"/>
+              <a:t>Detour – Data Preparation</a:t>
+            </a:r>
+          </a:p>
+        </p:txBody>
+      </p:sp>
+      <p:sp>
+        <p:nvSpPr>
+          <p:cNvPr id="3" name="Content Placeholder 2">
+            <a:extLst>
+              <a:ext uri="{FF2B5EF4-FFF2-40B4-BE49-F238E27FC236}">
+                <a16:creationId xmlns:a16="http://schemas.microsoft.com/office/drawing/2014/main" id="{ED0DDFF6-5FAF-AB7F-2F5F-79C4CB2D7137}"/>
+              </a:ext>
+            </a:extLst>
+          </p:cNvPr>
+          <p:cNvSpPr>
+            <a:spLocks noGrp="1"/>
+          </p:cNvSpPr>
+          <p:nvPr>
+            <p:ph idx="1"/>
+          </p:nvPr>
+        </p:nvSpPr>
+        <p:spPr/>
+        <p:txBody>
+          <a:bodyPr/>
+          <a:lstStyle/>
+          <a:p>
+            <a:r>
+              <a:rPr lang="en-US" dirty="0"/>
+              <a:t>As noted, there is often specific data preparation needed. </a:t>
+            </a:r>
+          </a:p>
+          <a:p>
+            <a:r>
+              <a:rPr lang="en-US" dirty="0"/>
+              <a:t>This is a good chance to make a prep function. </a:t>
+            </a:r>
+          </a:p>
+          <a:p>
+            <a:pPr lvl="1"/>
+            <a:r>
+              <a:rPr lang="en-US" dirty="0"/>
+              <a:t>Input – original data format. </a:t>
+            </a:r>
+          </a:p>
+          <a:p>
+            <a:pPr lvl="1"/>
+            <a:r>
+              <a:rPr lang="en-US" dirty="0"/>
+              <a:t>Output – what you need. </a:t>
+            </a:r>
+          </a:p>
+          <a:p>
+            <a:pPr lvl="1"/>
+            <a:r>
+              <a:rPr lang="en-US" dirty="0"/>
+              <a:t>Arguments (optional) – can you configure different options to handle more scenarios. </a:t>
+            </a:r>
+          </a:p>
+          <a:p>
+            <a:r>
+              <a:rPr lang="en-US" dirty="0"/>
+              <a:t>This isn’t mandatory (unless specified) but is good practice. </a:t>
+            </a:r>
+          </a:p>
+        </p:txBody>
+      </p:sp>
+    </p:spTree>
+    <p:extLst>
+      <p:ext uri="{BB962C8B-B14F-4D97-AF65-F5344CB8AC3E}">
+        <p14:creationId xmlns:p14="http://schemas.microsoft.com/office/powerpoint/2010/main" val="698242479"/>
+      </p:ext>
+    </p:extLst>
+  </p:cSld>
+  <p:clrMapOvr>
+    <a:masterClrMapping/>
+  </p:clrMapOvr>
+</p:sld>
+</file>
+
+<file path=ppt/slides/slide29.xml><?xml version="1.0" encoding="utf-8"?>
+<p:sld xmlns:a="http://schemas.openxmlformats.org/drawingml/2006/main" xmlns:r="http://schemas.openxmlformats.org/officeDocument/2006/relationships" xmlns:p="http://schemas.openxmlformats.org/presentationml/2006/main">
+  <p:cSld>
+    <p:spTree>
+      <p:nvGrpSpPr>
+        <p:cNvPr id="1" name=""/>
+        <p:cNvGrpSpPr/>
+        <p:nvPr/>
+      </p:nvGrpSpPr>
+      <p:grpSpPr>
+        <a:xfrm>
+          <a:off x="0" y="0"/>
+          <a:ext cx="0" cy="0"/>
+          <a:chOff x="0" y="0"/>
+          <a:chExt cx="0" cy="0"/>
+        </a:xfrm>
+      </p:grpSpPr>
+      <p:sp>
+        <p:nvSpPr>
+          <p:cNvPr id="2" name="Title 1">
+            <a:extLst>
+              <a:ext uri="{FF2B5EF4-FFF2-40B4-BE49-F238E27FC236}">
+                <a16:creationId xmlns:a16="http://schemas.microsoft.com/office/drawing/2014/main" id="{F269D49D-03CB-7D55-2DA3-AE6BC19514A8}"/>
+              </a:ext>
+            </a:extLst>
+          </p:cNvPr>
+          <p:cNvSpPr>
+            <a:spLocks noGrp="1"/>
+          </p:cNvSpPr>
+          <p:nvPr>
+            <p:ph type="title"/>
+          </p:nvPr>
+        </p:nvSpPr>
+        <p:spPr/>
+        <p:txBody>
+          <a:bodyPr/>
+          <a:lstStyle/>
+          <a:p>
+            <a:r>
+              <a:rPr lang="en-US" dirty="0"/>
+              <a:t>What do I need to Remember?</a:t>
+            </a:r>
+          </a:p>
+        </p:txBody>
+      </p:sp>
+      <p:sp>
+        <p:nvSpPr>
+          <p:cNvPr id="3" name="Content Placeholder 2">
+            <a:extLst>
+              <a:ext uri="{FF2B5EF4-FFF2-40B4-BE49-F238E27FC236}">
+                <a16:creationId xmlns:a16="http://schemas.microsoft.com/office/drawing/2014/main" id="{AAECF1AF-5E31-7404-F6ED-F2A1B092ED21}"/>
+              </a:ext>
+            </a:extLst>
+          </p:cNvPr>
+          <p:cNvSpPr>
+            <a:spLocks noGrp="1"/>
+          </p:cNvSpPr>
+          <p:nvPr>
+            <p:ph idx="1"/>
+          </p:nvPr>
+        </p:nvSpPr>
+        <p:spPr/>
+        <p:txBody>
+          <a:bodyPr/>
+          <a:lstStyle/>
+          <a:p>
+            <a:r>
+              <a:rPr lang="en-US" dirty="0"/>
+              <a:t>The workbook contains several examples done by hand, this is for info, use libraries. </a:t>
+            </a:r>
+          </a:p>
+          <a:p>
+            <a:pPr lvl="1"/>
+            <a:r>
+              <a:rPr lang="en-US" dirty="0"/>
+              <a:t>Some are slightly simplified, all are more annoying than using premade functions. </a:t>
+            </a:r>
+          </a:p>
+          <a:p>
+            <a:pPr lvl="1"/>
+            <a:r>
+              <a:rPr lang="en-US" dirty="0"/>
+              <a:t>You don’t </a:t>
+            </a:r>
+          </a:p>
+        </p:txBody>
+      </p:sp>
+    </p:spTree>
+    <p:extLst>
+      <p:ext uri="{BB962C8B-B14F-4D97-AF65-F5344CB8AC3E}">
+        <p14:creationId xmlns:p14="http://schemas.microsoft.com/office/powerpoint/2010/main" val="1528431993"/>
+      </p:ext>
+    </p:extLst>
+  </p:cSld>
+  <p:clrMapOvr>
+    <a:masterClrMapping/>
+  </p:clrMapOvr>
+</p:sld>
+</file>
+
+<file path=ppt/slides/slide3.xml><?xml version="1.0" encoding="utf-8"?>
+<p:sld xmlns:a="http://schemas.openxmlformats.org/drawingml/2006/main" xmlns:r="http://schemas.openxmlformats.org/officeDocument/2006/relationships" xmlns:p="http://schemas.openxmlformats.org/presentationml/2006/main">
+  <p:cSld>
+    <p:spTree>
+      <p:nvGrpSpPr>
+        <p:cNvPr id="1" name=""/>
+        <p:cNvGrpSpPr/>
+        <p:nvPr/>
+      </p:nvGrpSpPr>
+      <p:grpSpPr>
+        <a:xfrm>
+          <a:off x="0" y="0"/>
+          <a:ext cx="0" cy="0"/>
+          <a:chOff x="0" y="0"/>
+          <a:chExt cx="0" cy="0"/>
+        </a:xfrm>
+      </p:grpSpPr>
+      <p:sp>
+        <p:nvSpPr>
+          <p:cNvPr id="2" name="Title 1">
+            <a:extLst>
+              <a:ext uri="{FF2B5EF4-FFF2-40B4-BE49-F238E27FC236}">
+                <a16:creationId xmlns:a16="http://schemas.microsoft.com/office/drawing/2014/main" id="{ED476E18-0649-6AB1-C492-241746DCA6B9}"/>
+              </a:ext>
+            </a:extLst>
+          </p:cNvPr>
+          <p:cNvSpPr>
+            <a:spLocks noGrp="1"/>
+          </p:cNvSpPr>
+          <p:nvPr>
+            <p:ph type="ctrTitle"/>
+          </p:nvPr>
+        </p:nvSpPr>
+        <p:spPr/>
+        <p:txBody>
+          <a:bodyPr/>
+          <a:lstStyle/>
+          <a:p>
+            <a:r>
+              <a:rPr lang="en-US" dirty="0"/>
+              <a:t>Survival and Hazards</a:t>
+            </a:r>
+          </a:p>
+        </p:txBody>
+      </p:sp>
+      <p:sp>
+        <p:nvSpPr>
+          <p:cNvPr id="3" name="Subtitle 2">
+            <a:extLst>
+              <a:ext uri="{FF2B5EF4-FFF2-40B4-BE49-F238E27FC236}">
+                <a16:creationId xmlns:a16="http://schemas.microsoft.com/office/drawing/2014/main" id="{4ED31903-EAF8-3979-D108-06C244A70FAE}"/>
+              </a:ext>
+            </a:extLst>
+          </p:cNvPr>
+          <p:cNvSpPr>
+            <a:spLocks noGrp="1"/>
+          </p:cNvSpPr>
+          <p:nvPr>
+            <p:ph type="subTitle" idx="1"/>
+          </p:nvPr>
+        </p:nvSpPr>
+        <p:spPr/>
+        <p:txBody>
+          <a:bodyPr/>
+          <a:lstStyle/>
+          <a:p>
+            <a:endParaRPr lang="en-US"/>
+          </a:p>
+        </p:txBody>
+      </p:sp>
+    </p:spTree>
+    <p:extLst>
+      <p:ext uri="{BB962C8B-B14F-4D97-AF65-F5344CB8AC3E}">
+        <p14:creationId xmlns:p14="http://schemas.microsoft.com/office/powerpoint/2010/main" val="2700347393"/>
+      </p:ext>
+    </p:extLst>
+  </p:cSld>
+  <p:clrMapOvr>
+    <a:masterClrMapping/>
+  </p:clrMapOvr>
+</p:sld>
+</file>
+
+<file path=ppt/slides/slide30.xml><?xml version="1.0" encoding="utf-8"?>
+<p:sld xmlns:a="http://schemas.openxmlformats.org/drawingml/2006/main" xmlns:r="http://schemas.openxmlformats.org/officeDocument/2006/relationships" xmlns:p="http://schemas.openxmlformats.org/presentationml/2006/main">
+  <p:cSld>
+    <p:spTree>
+      <p:nvGrpSpPr>
+        <p:cNvPr id="1" name=""/>
+        <p:cNvGrpSpPr/>
+        <p:nvPr/>
+      </p:nvGrpSpPr>
+      <p:grpSpPr>
+        <a:xfrm>
+          <a:off x="0" y="0"/>
+          <a:ext cx="0" cy="0"/>
+          <a:chOff x="0" y="0"/>
+          <a:chExt cx="0" cy="0"/>
+        </a:xfrm>
+      </p:grpSpPr>
+      <p:sp>
+        <p:nvSpPr>
+          <p:cNvPr id="2" name="Title 1">
+            <a:extLst>
+              <a:ext uri="{FF2B5EF4-FFF2-40B4-BE49-F238E27FC236}">
+                <a16:creationId xmlns:a16="http://schemas.microsoft.com/office/drawing/2014/main" id="{34F01CDF-4C42-615F-3534-C70346B9D37E}"/>
+              </a:ext>
+            </a:extLst>
+          </p:cNvPr>
+          <p:cNvSpPr>
+            <a:spLocks noGrp="1"/>
+          </p:cNvSpPr>
+          <p:nvPr>
+            <p:ph type="title"/>
+          </p:nvPr>
+        </p:nvSpPr>
+        <p:spPr/>
+        <p:txBody>
+          <a:bodyPr/>
+          <a:lstStyle/>
+          <a:p>
+            <a:r>
+              <a:rPr lang="en-US" dirty="0"/>
+              <a:t>Drive to Survive</a:t>
+            </a:r>
+          </a:p>
+        </p:txBody>
+      </p:sp>
+      <p:sp>
+        <p:nvSpPr>
+          <p:cNvPr id="3" name="Content Placeholder 2">
+            <a:extLst>
+              <a:ext uri="{FF2B5EF4-FFF2-40B4-BE49-F238E27FC236}">
+                <a16:creationId xmlns:a16="http://schemas.microsoft.com/office/drawing/2014/main" id="{70857D2F-67D7-F96B-6DDC-1C5AA5E093D5}"/>
+              </a:ext>
+            </a:extLst>
+          </p:cNvPr>
+          <p:cNvSpPr>
+            <a:spLocks noGrp="1"/>
+          </p:cNvSpPr>
+          <p:nvPr>
+            <p:ph idx="1"/>
+          </p:nvPr>
+        </p:nvSpPr>
+        <p:spPr>
+          <a:xfrm>
+            <a:off x="1451579" y="2015732"/>
+            <a:ext cx="9603275" cy="4037749"/>
+          </a:xfrm>
+        </p:spPr>
+        <p:txBody>
+          <a:bodyPr/>
+          <a:lstStyle/>
+          <a:p>
+            <a:r>
+              <a:rPr lang="en-US" dirty="0"/>
+              <a:t>Survival is relevant in many real-world applications. </a:t>
+            </a:r>
+          </a:p>
+          <a:p>
+            <a:r>
+              <a:rPr lang="en-US" dirty="0"/>
+              <a:t>May need to prep data, but after that most things are easy. </a:t>
+            </a:r>
+          </a:p>
+          <a:p>
+            <a:pPr lvl="1"/>
+            <a:r>
+              <a:rPr lang="en-US" dirty="0"/>
+              <a:t>Time/event may not exist in that format in original data – e.g. “end date” needs math. </a:t>
+            </a:r>
+          </a:p>
+          <a:p>
+            <a:r>
+              <a:rPr lang="en-US" dirty="0"/>
+              <a:t>Not critically important to most other topics we need, but may come up…</a:t>
+            </a:r>
+          </a:p>
+          <a:p>
+            <a:pPr lvl="1"/>
+            <a:r>
+              <a:rPr lang="en-US" dirty="0"/>
+              <a:t>Put the basics in your toolbox and be ready to expand on details as needed. </a:t>
+            </a:r>
+          </a:p>
+          <a:p>
+            <a:pPr lvl="1"/>
+            <a:r>
+              <a:rPr lang="en-US" dirty="0"/>
+              <a:t>The project in the next semester might have some survival relevant stuff…</a:t>
+            </a:r>
+          </a:p>
+        </p:txBody>
+      </p:sp>
+    </p:spTree>
+    <p:extLst>
+      <p:ext uri="{BB962C8B-B14F-4D97-AF65-F5344CB8AC3E}">
+        <p14:creationId xmlns:p14="http://schemas.microsoft.com/office/powerpoint/2010/main" val="2139251949"/>
+      </p:ext>
+    </p:extLst>
+  </p:cSld>
+  <p:clrMapOvr>
+    <a:masterClrMapping/>
+  </p:clrMapOvr>
+</p:sld>
+</file>
+
+<file path=ppt/slides/slide4.xml><?xml version="1.0" encoding="utf-8"?>
 <p:sld xmlns:a="http://schemas.openxmlformats.org/drawingml/2006/main" xmlns:r="http://schemas.openxmlformats.org/officeDocument/2006/relationships" xmlns:p="http://schemas.openxmlformats.org/presentationml/2006/main">
   <p:cSld>
     <p:spTree>
@@ -6014,7 +7794,7 @@
 </p:sld>
 </file>
 
-<file path=ppt/slides/slide20.xml><?xml version="1.0" encoding="utf-8"?>
+<file path=ppt/slides/slide5.xml><?xml version="1.0" encoding="utf-8"?>
 <p:sld xmlns:a="http://schemas.openxmlformats.org/drawingml/2006/main" xmlns:r="http://schemas.openxmlformats.org/officeDocument/2006/relationships" xmlns:p="http://schemas.openxmlformats.org/presentationml/2006/main">
   <p:cSld>
     <p:spTree>
@@ -6036,1228 +7816,6 @@
           <p:cNvPr id="2" name="Title 1">
             <a:extLst>
               <a:ext uri="{FF2B5EF4-FFF2-40B4-BE49-F238E27FC236}">
-                <a16:creationId xmlns:a16="http://schemas.microsoft.com/office/drawing/2014/main" id="{983AAD23-E110-9FDA-156B-429E79FA8793}"/>
-              </a:ext>
-            </a:extLst>
-          </p:cNvPr>
-          <p:cNvSpPr>
-            <a:spLocks noGrp="1"/>
-          </p:cNvSpPr>
-          <p:nvPr>
-            <p:ph type="title"/>
-          </p:nvPr>
-        </p:nvSpPr>
-        <p:spPr/>
-        <p:txBody>
-          <a:bodyPr/>
-          <a:lstStyle/>
-          <a:p>
-            <a:r>
-              <a:rPr lang="en-US" dirty="0"/>
-              <a:t>Remaining Lifetime</a:t>
-            </a:r>
-          </a:p>
-        </p:txBody>
-      </p:sp>
-      <p:sp>
-        <p:nvSpPr>
-          <p:cNvPr id="3" name="Content Placeholder 2">
-            <a:extLst>
-              <a:ext uri="{FF2B5EF4-FFF2-40B4-BE49-F238E27FC236}">
-                <a16:creationId xmlns:a16="http://schemas.microsoft.com/office/drawing/2014/main" id="{3D56C3F1-1278-9317-65F7-B821C0041B02}"/>
-              </a:ext>
-            </a:extLst>
-          </p:cNvPr>
-          <p:cNvSpPr>
-            <a:spLocks noGrp="1"/>
-          </p:cNvSpPr>
-          <p:nvPr>
-            <p:ph idx="1"/>
-          </p:nvPr>
-        </p:nvSpPr>
-        <p:spPr/>
-        <p:txBody>
-          <a:bodyPr/>
-          <a:lstStyle/>
-          <a:p>
-            <a:r>
-              <a:rPr lang="en-US" dirty="0"/>
-              <a:t>We can generate an estimation of remaining lifetime. </a:t>
-            </a:r>
-          </a:p>
-          <a:p>
-            <a:pPr lvl="1"/>
-            <a:r>
-              <a:rPr lang="en-US" dirty="0"/>
-              <a:t>Given that you’ve made it this far, how long do you have left? </a:t>
-            </a:r>
-          </a:p>
-        </p:txBody>
-      </p:sp>
-    </p:spTree>
-    <p:extLst>
-      <p:ext uri="{BB962C8B-B14F-4D97-AF65-F5344CB8AC3E}">
-        <p14:creationId xmlns:p14="http://schemas.microsoft.com/office/powerpoint/2010/main" val="3187493989"/>
-      </p:ext>
-    </p:extLst>
-  </p:cSld>
-  <p:clrMapOvr>
-    <a:masterClrMapping/>
-  </p:clrMapOvr>
-</p:sld>
-</file>
-
-<file path=ppt/slides/slide21.xml><?xml version="1.0" encoding="utf-8"?>
-<p:sld xmlns:a="http://schemas.openxmlformats.org/drawingml/2006/main" xmlns:r="http://schemas.openxmlformats.org/officeDocument/2006/relationships" xmlns:p="http://schemas.openxmlformats.org/presentationml/2006/main">
-  <p:cSld>
-    <p:spTree>
-      <p:nvGrpSpPr>
-        <p:cNvPr id="1" name=""/>
-        <p:cNvGrpSpPr/>
-        <p:nvPr/>
-      </p:nvGrpSpPr>
-      <p:grpSpPr>
-        <a:xfrm>
-          <a:off x="0" y="0"/>
-          <a:ext cx="0" cy="0"/>
-          <a:chOff x="0" y="0"/>
-          <a:chExt cx="0" cy="0"/>
-        </a:xfrm>
-      </p:grpSpPr>
-      <p:sp>
-        <p:nvSpPr>
-          <p:cNvPr id="2" name="Title 1">
-            <a:extLst>
-              <a:ext uri="{FF2B5EF4-FFF2-40B4-BE49-F238E27FC236}">
-                <a16:creationId xmlns:a16="http://schemas.microsoft.com/office/drawing/2014/main" id="{A0233FF3-C831-FB6B-6BE6-33E196AC9283}"/>
-              </a:ext>
-            </a:extLst>
-          </p:cNvPr>
-          <p:cNvSpPr>
-            <a:spLocks noGrp="1"/>
-          </p:cNvSpPr>
-          <p:nvPr>
-            <p:ph type="title"/>
-          </p:nvPr>
-        </p:nvSpPr>
-        <p:spPr/>
-        <p:txBody>
-          <a:bodyPr/>
-          <a:lstStyle/>
-          <a:p>
-            <a:r>
-              <a:rPr lang="en-US" dirty="0"/>
-              <a:t>Confidence Intervals and Simulation</a:t>
-            </a:r>
-          </a:p>
-        </p:txBody>
-      </p:sp>
-      <p:sp>
-        <p:nvSpPr>
-          <p:cNvPr id="3" name="Content Placeholder 2">
-            <a:extLst>
-              <a:ext uri="{FF2B5EF4-FFF2-40B4-BE49-F238E27FC236}">
-                <a16:creationId xmlns:a16="http://schemas.microsoft.com/office/drawing/2014/main" id="{AD9F8DBC-D6B5-AE80-5E67-A4262901F2AB}"/>
-              </a:ext>
-            </a:extLst>
-          </p:cNvPr>
-          <p:cNvSpPr>
-            <a:spLocks noGrp="1"/>
-          </p:cNvSpPr>
-          <p:nvPr>
-            <p:ph idx="1"/>
-          </p:nvPr>
-        </p:nvSpPr>
-        <p:spPr>
-          <a:xfrm>
-            <a:off x="101600" y="1853754"/>
-            <a:ext cx="6151617" cy="3988246"/>
-          </a:xfrm>
-        </p:spPr>
-        <p:txBody>
-          <a:bodyPr>
-            <a:normAutofit/>
-          </a:bodyPr>
-          <a:lstStyle/>
-          <a:p>
-            <a:r>
-              <a:rPr lang="en-US" dirty="0"/>
-              <a:t>Survival is, obviously, something where we don’t have all the info. </a:t>
-            </a:r>
-          </a:p>
-          <a:p>
-            <a:r>
-              <a:rPr lang="en-US" dirty="0"/>
-              <a:t>Our survival projections have error. </a:t>
-            </a:r>
-          </a:p>
-          <a:p>
-            <a:r>
-              <a:rPr lang="en-US" dirty="0"/>
-              <a:t>We can show the confidence with CI. </a:t>
-            </a:r>
-          </a:p>
-          <a:p>
-            <a:r>
-              <a:rPr lang="en-US" dirty="0"/>
-              <a:t>We can generate CI via monte </a:t>
-            </a:r>
-            <a:r>
-              <a:rPr lang="en-US" dirty="0" err="1"/>
-              <a:t>carlo</a:t>
-            </a:r>
-            <a:r>
-              <a:rPr lang="en-US" dirty="0"/>
-              <a:t> processes. </a:t>
-            </a:r>
-          </a:p>
-          <a:p>
-            <a:pPr lvl="1"/>
-            <a:r>
-              <a:rPr lang="en-US" dirty="0"/>
-              <a:t>Take the data, resample with replacement, calculate survival. </a:t>
-            </a:r>
-          </a:p>
-          <a:p>
-            <a:pPr lvl="1"/>
-            <a:r>
-              <a:rPr lang="en-US" dirty="0"/>
-              <a:t>Do many times, calculate where 99/95/90% of results lie. </a:t>
-            </a:r>
-          </a:p>
-        </p:txBody>
-      </p:sp>
-      <p:pic>
-        <p:nvPicPr>
-          <p:cNvPr id="4" name="Picture 3">
-            <a:extLst>
-              <a:ext uri="{FF2B5EF4-FFF2-40B4-BE49-F238E27FC236}">
-                <a16:creationId xmlns:a16="http://schemas.microsoft.com/office/drawing/2014/main" id="{4BDFFD3F-A1D1-AE9C-FDD0-38DC8D762B3D}"/>
-              </a:ext>
-            </a:extLst>
-          </p:cNvPr>
-          <p:cNvPicPr>
-            <a:picLocks noChangeAspect="1"/>
-          </p:cNvPicPr>
-          <p:nvPr/>
-        </p:nvPicPr>
-        <p:blipFill>
-          <a:blip r:embed="rId2"/>
-          <a:stretch>
-            <a:fillRect/>
-          </a:stretch>
-        </p:blipFill>
-        <p:spPr>
-          <a:xfrm>
-            <a:off x="6253216" y="1493138"/>
-            <a:ext cx="5943600" cy="4495800"/>
-          </a:xfrm>
-          <a:prstGeom prst="rect">
-            <a:avLst/>
-          </a:prstGeom>
-        </p:spPr>
-      </p:pic>
-    </p:spTree>
-    <p:extLst>
-      <p:ext uri="{BB962C8B-B14F-4D97-AF65-F5344CB8AC3E}">
-        <p14:creationId xmlns:p14="http://schemas.microsoft.com/office/powerpoint/2010/main" val="3767739599"/>
-      </p:ext>
-    </p:extLst>
-  </p:cSld>
-  <p:clrMapOvr>
-    <a:masterClrMapping/>
-  </p:clrMapOvr>
-</p:sld>
-</file>
-
-<file path=ppt/slides/slide22.xml><?xml version="1.0" encoding="utf-8"?>
-<p:sld xmlns:a="http://schemas.openxmlformats.org/drawingml/2006/main" xmlns:r="http://schemas.openxmlformats.org/officeDocument/2006/relationships" xmlns:p="http://schemas.openxmlformats.org/presentationml/2006/main">
-  <p:cSld>
-    <p:spTree>
-      <p:nvGrpSpPr>
-        <p:cNvPr id="1" name=""/>
-        <p:cNvGrpSpPr/>
-        <p:nvPr/>
-      </p:nvGrpSpPr>
-      <p:grpSpPr>
-        <a:xfrm>
-          <a:off x="0" y="0"/>
-          <a:ext cx="0" cy="0"/>
-          <a:chOff x="0" y="0"/>
-          <a:chExt cx="0" cy="0"/>
-        </a:xfrm>
-      </p:grpSpPr>
-      <p:sp>
-        <p:nvSpPr>
-          <p:cNvPr id="2" name="Title 1">
-            <a:extLst>
-              <a:ext uri="{FF2B5EF4-FFF2-40B4-BE49-F238E27FC236}">
-                <a16:creationId xmlns:a16="http://schemas.microsoft.com/office/drawing/2014/main" id="{6DA058FB-586A-C07F-B889-35D9E1C3B457}"/>
-              </a:ext>
-            </a:extLst>
-          </p:cNvPr>
-          <p:cNvSpPr>
-            <a:spLocks noGrp="1"/>
-          </p:cNvSpPr>
-          <p:nvPr>
-            <p:ph type="title"/>
-          </p:nvPr>
-        </p:nvSpPr>
-        <p:spPr/>
-        <p:txBody>
-          <a:bodyPr/>
-          <a:lstStyle/>
-          <a:p>
-            <a:r>
-              <a:rPr lang="en-US" dirty="0"/>
-              <a:t>Cohort Comparisons</a:t>
-            </a:r>
-          </a:p>
-        </p:txBody>
-      </p:sp>
-      <p:sp>
-        <p:nvSpPr>
-          <p:cNvPr id="3" name="Content Placeholder 2">
-            <a:extLst>
-              <a:ext uri="{FF2B5EF4-FFF2-40B4-BE49-F238E27FC236}">
-                <a16:creationId xmlns:a16="http://schemas.microsoft.com/office/drawing/2014/main" id="{5A234E1E-A125-E6EA-17A1-965849055CC6}"/>
-              </a:ext>
-            </a:extLst>
-          </p:cNvPr>
-          <p:cNvSpPr>
-            <a:spLocks noGrp="1"/>
-          </p:cNvSpPr>
-          <p:nvPr>
-            <p:ph idx="1"/>
-          </p:nvPr>
-        </p:nvSpPr>
-        <p:spPr>
-          <a:xfrm>
-            <a:off x="5261578" y="2015732"/>
-            <a:ext cx="5793275" cy="3450613"/>
-          </a:xfrm>
-        </p:spPr>
-        <p:txBody>
-          <a:bodyPr/>
-          <a:lstStyle/>
-          <a:p>
-            <a:r>
-              <a:rPr lang="en-US" dirty="0"/>
-              <a:t>These types of lifetime projections are often useful with comparing cohorts. </a:t>
-            </a:r>
-          </a:p>
-          <a:p>
-            <a:r>
-              <a:rPr lang="en-US" dirty="0"/>
-              <a:t>We can do this by splitting data in prep and doing one set of calculations for each cohort. </a:t>
-            </a:r>
-          </a:p>
-          <a:p>
-            <a:r>
-              <a:rPr lang="en-US" dirty="0"/>
-              <a:t>If we are comparing two cohorts, these two seem to be different…. </a:t>
-            </a:r>
-            <a:r>
-              <a:rPr lang="en-US"/>
-              <a:t>But are they?</a:t>
-            </a:r>
-          </a:p>
-        </p:txBody>
-      </p:sp>
-      <p:pic>
-        <p:nvPicPr>
-          <p:cNvPr id="4" name="Picture 3">
-            <a:extLst>
-              <a:ext uri="{FF2B5EF4-FFF2-40B4-BE49-F238E27FC236}">
-                <a16:creationId xmlns:a16="http://schemas.microsoft.com/office/drawing/2014/main" id="{BE2BA802-F08D-E418-0235-3F18345339EA}"/>
-              </a:ext>
-            </a:extLst>
-          </p:cNvPr>
-          <p:cNvPicPr>
-            <a:picLocks noChangeAspect="1"/>
-          </p:cNvPicPr>
-          <p:nvPr/>
-        </p:nvPicPr>
-        <p:blipFill>
-          <a:blip r:embed="rId2"/>
-          <a:stretch>
-            <a:fillRect/>
-          </a:stretch>
-        </p:blipFill>
-        <p:spPr>
-          <a:xfrm>
-            <a:off x="1451579" y="1969388"/>
-            <a:ext cx="3810000" cy="3543300"/>
-          </a:xfrm>
-          <a:prstGeom prst="rect">
-            <a:avLst/>
-          </a:prstGeom>
-        </p:spPr>
-      </p:pic>
-    </p:spTree>
-    <p:extLst>
-      <p:ext uri="{BB962C8B-B14F-4D97-AF65-F5344CB8AC3E}">
-        <p14:creationId xmlns:p14="http://schemas.microsoft.com/office/powerpoint/2010/main" val="3861675422"/>
-      </p:ext>
-    </p:extLst>
-  </p:cSld>
-  <p:clrMapOvr>
-    <a:masterClrMapping/>
-  </p:clrMapOvr>
-</p:sld>
-</file>
-
-<file path=ppt/slides/slide23.xml><?xml version="1.0" encoding="utf-8"?>
-<p:sld xmlns:a="http://schemas.openxmlformats.org/drawingml/2006/main" xmlns:r="http://schemas.openxmlformats.org/officeDocument/2006/relationships" xmlns:p="http://schemas.openxmlformats.org/presentationml/2006/main">
-  <p:cSld>
-    <p:spTree>
-      <p:nvGrpSpPr>
-        <p:cNvPr id="1" name=""/>
-        <p:cNvGrpSpPr/>
-        <p:nvPr/>
-      </p:nvGrpSpPr>
-      <p:grpSpPr>
-        <a:xfrm>
-          <a:off x="0" y="0"/>
-          <a:ext cx="0" cy="0"/>
-          <a:chOff x="0" y="0"/>
-          <a:chExt cx="0" cy="0"/>
-        </a:xfrm>
-      </p:grpSpPr>
-      <p:sp>
-        <p:nvSpPr>
-          <p:cNvPr id="2" name="Title 1">
-            <a:extLst>
-              <a:ext uri="{FF2B5EF4-FFF2-40B4-BE49-F238E27FC236}">
-                <a16:creationId xmlns:a16="http://schemas.microsoft.com/office/drawing/2014/main" id="{391314BC-5708-A415-D43B-7A2C628CA00D}"/>
-              </a:ext>
-            </a:extLst>
-          </p:cNvPr>
-          <p:cNvSpPr>
-            <a:spLocks noGrp="1"/>
-          </p:cNvSpPr>
-          <p:nvPr>
-            <p:ph type="title"/>
-          </p:nvPr>
-        </p:nvSpPr>
-        <p:spPr/>
-        <p:txBody>
-          <a:bodyPr/>
-          <a:lstStyle/>
-          <a:p>
-            <a:r>
-              <a:rPr lang="en-US" dirty="0"/>
-              <a:t>Application – Log-Rank Test</a:t>
-            </a:r>
-          </a:p>
-        </p:txBody>
-      </p:sp>
-      <p:sp>
-        <p:nvSpPr>
-          <p:cNvPr id="3" name="Content Placeholder 2">
-            <a:extLst>
-              <a:ext uri="{FF2B5EF4-FFF2-40B4-BE49-F238E27FC236}">
-                <a16:creationId xmlns:a16="http://schemas.microsoft.com/office/drawing/2014/main" id="{8B953BF6-4F6C-59B7-65B0-293C19970924}"/>
-              </a:ext>
-            </a:extLst>
-          </p:cNvPr>
-          <p:cNvSpPr>
-            <a:spLocks noGrp="1"/>
-          </p:cNvSpPr>
-          <p:nvPr>
-            <p:ph idx="1"/>
-          </p:nvPr>
-        </p:nvSpPr>
-        <p:spPr>
-          <a:xfrm>
-            <a:off x="6366179" y="2015732"/>
-            <a:ext cx="5174179" cy="4037749"/>
-          </a:xfrm>
-        </p:spPr>
-        <p:txBody>
-          <a:bodyPr>
-            <a:normAutofit/>
-          </a:bodyPr>
-          <a:lstStyle/>
-          <a:p>
-            <a:r>
-              <a:rPr lang="en-US" dirty="0"/>
-              <a:t>A log-rank test is roughly analogous to a hypothesis test for a distribution. </a:t>
-            </a:r>
-          </a:p>
-          <a:p>
-            <a:pPr lvl="1"/>
-            <a:r>
-              <a:rPr lang="en-US" dirty="0"/>
-              <a:t>Do these two samples appear to come from the same population. </a:t>
-            </a:r>
-          </a:p>
-          <a:p>
-            <a:pPr lvl="1"/>
-            <a:r>
-              <a:rPr lang="en-US" dirty="0"/>
-              <a:t>Null hypothesis: The groups have the same survival function over time.</a:t>
-            </a:r>
-          </a:p>
-          <a:p>
-            <a:pPr lvl="1"/>
-            <a:r>
-              <a:rPr lang="en-US" dirty="0"/>
-              <a:t>Alternative hypothesis: At least one group has a different survival function.</a:t>
-            </a:r>
-          </a:p>
-          <a:p>
-            <a:r>
-              <a:rPr lang="en-US" dirty="0"/>
-              <a:t>E.g. are employees quitting this </a:t>
-            </a:r>
-            <a:r>
-              <a:rPr lang="en-US" dirty="0" err="1"/>
-              <a:t>McD</a:t>
-            </a:r>
-            <a:r>
-              <a:rPr lang="en-US" dirty="0"/>
-              <a:t> for some reason, or just normal turnover?</a:t>
-            </a:r>
-          </a:p>
-        </p:txBody>
-      </p:sp>
-      <p:pic>
-        <p:nvPicPr>
-          <p:cNvPr id="4" name="Picture 3" descr="Log Rank Test Hypotheses">
-            <a:extLst>
-              <a:ext uri="{FF2B5EF4-FFF2-40B4-BE49-F238E27FC236}">
-                <a16:creationId xmlns:a16="http://schemas.microsoft.com/office/drawing/2014/main" id="{D6ECC6C6-7F86-40F8-B469-1F2DD1F630EB}"/>
-              </a:ext>
-            </a:extLst>
-          </p:cNvPr>
-          <p:cNvPicPr>
-            <a:picLocks noChangeAspect="1"/>
-          </p:cNvPicPr>
-          <p:nvPr/>
-        </p:nvPicPr>
-        <p:blipFill>
-          <a:blip r:embed="rId2"/>
-          <a:stretch>
-            <a:fillRect/>
-          </a:stretch>
-        </p:blipFill>
-        <p:spPr>
-          <a:xfrm>
-            <a:off x="218745" y="2185147"/>
-            <a:ext cx="6147435" cy="3293898"/>
-          </a:xfrm>
-          <a:prstGeom prst="rect">
-            <a:avLst/>
-          </a:prstGeom>
-        </p:spPr>
-      </p:pic>
-    </p:spTree>
-    <p:extLst>
-      <p:ext uri="{BB962C8B-B14F-4D97-AF65-F5344CB8AC3E}">
-        <p14:creationId xmlns:p14="http://schemas.microsoft.com/office/powerpoint/2010/main" val="380687327"/>
-      </p:ext>
-    </p:extLst>
-  </p:cSld>
-  <p:clrMapOvr>
-    <a:masterClrMapping/>
-  </p:clrMapOvr>
-</p:sld>
-</file>
-
-<file path=ppt/slides/slide24.xml><?xml version="1.0" encoding="utf-8"?>
-<p:sld xmlns:a="http://schemas.openxmlformats.org/drawingml/2006/main" xmlns:r="http://schemas.openxmlformats.org/officeDocument/2006/relationships" xmlns:p="http://schemas.openxmlformats.org/presentationml/2006/main">
-  <p:cSld>
-    <p:spTree>
-      <p:nvGrpSpPr>
-        <p:cNvPr id="1" name=""/>
-        <p:cNvGrpSpPr/>
-        <p:nvPr/>
-      </p:nvGrpSpPr>
-      <p:grpSpPr>
-        <a:xfrm>
-          <a:off x="0" y="0"/>
-          <a:ext cx="0" cy="0"/>
-          <a:chOff x="0" y="0"/>
-          <a:chExt cx="0" cy="0"/>
-        </a:xfrm>
-      </p:grpSpPr>
-      <p:sp>
-        <p:nvSpPr>
-          <p:cNvPr id="2" name="Title 1">
-            <a:extLst>
-              <a:ext uri="{FF2B5EF4-FFF2-40B4-BE49-F238E27FC236}">
-                <a16:creationId xmlns:a16="http://schemas.microsoft.com/office/drawing/2014/main" id="{033CE7EE-720D-296D-84F9-36CD40C810DD}"/>
-              </a:ext>
-            </a:extLst>
-          </p:cNvPr>
-          <p:cNvSpPr>
-            <a:spLocks noGrp="1"/>
-          </p:cNvSpPr>
-          <p:nvPr>
-            <p:ph type="title"/>
-          </p:nvPr>
-        </p:nvSpPr>
-        <p:spPr>
-          <a:xfrm>
-            <a:off x="5727700" y="804519"/>
-            <a:ext cx="5327154" cy="1049235"/>
-          </a:xfrm>
-        </p:spPr>
-        <p:txBody>
-          <a:bodyPr/>
-          <a:lstStyle/>
-          <a:p>
-            <a:r>
-              <a:rPr lang="en-US" dirty="0"/>
-              <a:t>Log Ranking</a:t>
-            </a:r>
-          </a:p>
-        </p:txBody>
-      </p:sp>
-      <p:sp>
-        <p:nvSpPr>
-          <p:cNvPr id="3" name="Content Placeholder 2">
-            <a:extLst>
-              <a:ext uri="{FF2B5EF4-FFF2-40B4-BE49-F238E27FC236}">
-                <a16:creationId xmlns:a16="http://schemas.microsoft.com/office/drawing/2014/main" id="{DB612A76-1626-9593-F256-492F61104F37}"/>
-              </a:ext>
-            </a:extLst>
-          </p:cNvPr>
-          <p:cNvSpPr>
-            <a:spLocks noGrp="1"/>
-          </p:cNvSpPr>
-          <p:nvPr>
-            <p:ph idx="1"/>
-          </p:nvPr>
-        </p:nvSpPr>
-        <p:spPr>
-          <a:xfrm>
-            <a:off x="5582894" y="2015732"/>
-            <a:ext cx="6520206" cy="4037749"/>
-          </a:xfrm>
-        </p:spPr>
-        <p:txBody>
-          <a:bodyPr/>
-          <a:lstStyle/>
-          <a:p>
-            <a:r>
-              <a:rPr lang="en-US" dirty="0"/>
-              <a:t>We don’t need to worry about implementation of this. </a:t>
-            </a:r>
-          </a:p>
-          <a:p>
-            <a:r>
-              <a:rPr lang="en-US" dirty="0"/>
-              <a:t>Similar in concept to chi2 – diff from expectation. </a:t>
-            </a:r>
-          </a:p>
-          <a:p>
-            <a:r>
-              <a:rPr lang="en-US" dirty="0"/>
-              <a:t>The final p-value check is the same as Chi2:</a:t>
-            </a:r>
-          </a:p>
-          <a:p>
-            <a:pPr lvl="1"/>
-            <a:r>
-              <a:rPr lang="en-US" dirty="0"/>
-              <a:t>The difference from expectation is calculated differently. </a:t>
-            </a:r>
-          </a:p>
-          <a:p>
-            <a:pPr lvl="1"/>
-            <a:r>
-              <a:rPr lang="en-US" dirty="0"/>
-              <a:t>The idea is identical – quantification of diff. </a:t>
-            </a:r>
-          </a:p>
-          <a:p>
-            <a:r>
-              <a:rPr lang="en-US" dirty="0"/>
-              <a:t>If this big of a difference rarely (low p) happens randomly, then there is probably a difference in the datasets. </a:t>
-            </a:r>
-          </a:p>
-          <a:p>
-            <a:r>
-              <a:rPr lang="en-US" dirty="0"/>
-              <a:t>Other options like </a:t>
-            </a:r>
-            <a:r>
-              <a:rPr lang="en-CA" i="1" dirty="0"/>
-              <a:t>Wilcoxon </a:t>
-            </a:r>
-            <a:endParaRPr lang="en-US" dirty="0"/>
-          </a:p>
-        </p:txBody>
-      </p:sp>
-      <p:pic>
-        <p:nvPicPr>
-          <p:cNvPr id="4" name="Picture 3">
-            <a:extLst>
-              <a:ext uri="{FF2B5EF4-FFF2-40B4-BE49-F238E27FC236}">
-                <a16:creationId xmlns:a16="http://schemas.microsoft.com/office/drawing/2014/main" id="{24F1FFF9-081F-C832-F354-64C078B1B48E}"/>
-              </a:ext>
-            </a:extLst>
-          </p:cNvPr>
-          <p:cNvPicPr>
-            <a:picLocks noChangeAspect="1"/>
-          </p:cNvPicPr>
-          <p:nvPr/>
-        </p:nvPicPr>
-        <p:blipFill>
-          <a:blip r:embed="rId2"/>
-          <a:stretch>
-            <a:fillRect/>
-          </a:stretch>
-        </p:blipFill>
-        <p:spPr>
-          <a:xfrm>
-            <a:off x="0" y="0"/>
-            <a:ext cx="5582894" cy="6858000"/>
-          </a:xfrm>
-          <a:prstGeom prst="rect">
-            <a:avLst/>
-          </a:prstGeom>
-        </p:spPr>
-      </p:pic>
-    </p:spTree>
-    <p:extLst>
-      <p:ext uri="{BB962C8B-B14F-4D97-AF65-F5344CB8AC3E}">
-        <p14:creationId xmlns:p14="http://schemas.microsoft.com/office/powerpoint/2010/main" val="4255244021"/>
-      </p:ext>
-    </p:extLst>
-  </p:cSld>
-  <p:clrMapOvr>
-    <a:masterClrMapping/>
-  </p:clrMapOvr>
-</p:sld>
-</file>
-
-<file path=ppt/slides/slide25.xml><?xml version="1.0" encoding="utf-8"?>
-<p:sld xmlns:a="http://schemas.openxmlformats.org/drawingml/2006/main" xmlns:r="http://schemas.openxmlformats.org/officeDocument/2006/relationships" xmlns:p="http://schemas.openxmlformats.org/presentationml/2006/main">
-  <p:cSld>
-    <p:spTree>
-      <p:nvGrpSpPr>
-        <p:cNvPr id="1" name=""/>
-        <p:cNvGrpSpPr/>
-        <p:nvPr/>
-      </p:nvGrpSpPr>
-      <p:grpSpPr>
-        <a:xfrm>
-          <a:off x="0" y="0"/>
-          <a:ext cx="0" cy="0"/>
-          <a:chOff x="0" y="0"/>
-          <a:chExt cx="0" cy="0"/>
-        </a:xfrm>
-      </p:grpSpPr>
-      <p:sp>
-        <p:nvSpPr>
-          <p:cNvPr id="2" name="Title 1">
-            <a:extLst>
-              <a:ext uri="{FF2B5EF4-FFF2-40B4-BE49-F238E27FC236}">
-                <a16:creationId xmlns:a16="http://schemas.microsoft.com/office/drawing/2014/main" id="{AF6F2850-6DB3-9F2A-88FD-6E4D70498472}"/>
-              </a:ext>
-            </a:extLst>
-          </p:cNvPr>
-          <p:cNvSpPr>
-            <a:spLocks noGrp="1"/>
-          </p:cNvSpPr>
-          <p:nvPr>
-            <p:ph type="title"/>
-          </p:nvPr>
-        </p:nvSpPr>
-        <p:spPr/>
-        <p:txBody>
-          <a:bodyPr/>
-          <a:lstStyle/>
-          <a:p>
-            <a:r>
-              <a:rPr lang="en-US" dirty="0"/>
-              <a:t>Log-Rank Usage</a:t>
-            </a:r>
-          </a:p>
-        </p:txBody>
-      </p:sp>
-      <p:sp>
-        <p:nvSpPr>
-          <p:cNvPr id="3" name="Content Placeholder 2">
-            <a:extLst>
-              <a:ext uri="{FF2B5EF4-FFF2-40B4-BE49-F238E27FC236}">
-                <a16:creationId xmlns:a16="http://schemas.microsoft.com/office/drawing/2014/main" id="{5B181DE7-1AEF-2635-5E82-88B42BC5B32F}"/>
-              </a:ext>
-            </a:extLst>
-          </p:cNvPr>
-          <p:cNvSpPr>
-            <a:spLocks noGrp="1"/>
-          </p:cNvSpPr>
-          <p:nvPr>
-            <p:ph idx="1"/>
-          </p:nvPr>
-        </p:nvSpPr>
-        <p:spPr>
-          <a:xfrm>
-            <a:off x="469900" y="2015732"/>
-            <a:ext cx="5404946" cy="3450613"/>
-          </a:xfrm>
-        </p:spPr>
-        <p:txBody>
-          <a:bodyPr/>
-          <a:lstStyle/>
-          <a:p>
-            <a:r>
-              <a:rPr lang="en-US" dirty="0"/>
-              <a:t>Performing a log-rank test is relatively simple. </a:t>
-            </a:r>
-          </a:p>
-          <a:p>
-            <a:r>
-              <a:rPr lang="en-US" dirty="0"/>
-              <a:t>Assumptions:</a:t>
-            </a:r>
-          </a:p>
-          <a:p>
-            <a:pPr lvl="1"/>
-            <a:r>
-              <a:rPr lang="en-US" dirty="0"/>
-              <a:t>Events are independent. </a:t>
-            </a:r>
-          </a:p>
-          <a:p>
-            <a:pPr lvl="1"/>
-            <a:r>
-              <a:rPr lang="en-US" dirty="0"/>
-              <a:t>Events over time are similar between groups.</a:t>
-            </a:r>
-          </a:p>
-          <a:p>
-            <a:pPr lvl="1"/>
-            <a:r>
-              <a:rPr lang="en-US" dirty="0"/>
-              <a:t>No/low crossing – if which survives better switches after the start, may </a:t>
-            </a:r>
-            <a:r>
-              <a:rPr lang="en-US"/>
-              <a:t>lower accuracy. </a:t>
-            </a:r>
-            <a:endParaRPr lang="en-US" dirty="0"/>
-          </a:p>
-          <a:p>
-            <a:r>
-              <a:rPr lang="en-US" dirty="0"/>
-              <a:t>We must provide the data as two groups of times and events. </a:t>
-            </a:r>
-          </a:p>
-        </p:txBody>
-      </p:sp>
-      <p:pic>
-        <p:nvPicPr>
-          <p:cNvPr id="5" name="Picture 4">
-            <a:extLst>
-              <a:ext uri="{FF2B5EF4-FFF2-40B4-BE49-F238E27FC236}">
-                <a16:creationId xmlns:a16="http://schemas.microsoft.com/office/drawing/2014/main" id="{4933F0DB-2FCE-FF8B-7C53-CE091344E58E}"/>
-              </a:ext>
-            </a:extLst>
-          </p:cNvPr>
-          <p:cNvPicPr>
-            <a:picLocks noChangeAspect="1"/>
-          </p:cNvPicPr>
-          <p:nvPr/>
-        </p:nvPicPr>
-        <p:blipFill>
-          <a:blip r:embed="rId2"/>
-          <a:stretch>
-            <a:fillRect/>
-          </a:stretch>
-        </p:blipFill>
-        <p:spPr>
-          <a:xfrm>
-            <a:off x="5874845" y="804519"/>
-            <a:ext cx="6223000" cy="5626100"/>
-          </a:xfrm>
-          <a:prstGeom prst="rect">
-            <a:avLst/>
-          </a:prstGeom>
-        </p:spPr>
-      </p:pic>
-    </p:spTree>
-    <p:extLst>
-      <p:ext uri="{BB962C8B-B14F-4D97-AF65-F5344CB8AC3E}">
-        <p14:creationId xmlns:p14="http://schemas.microsoft.com/office/powerpoint/2010/main" val="1943809997"/>
-      </p:ext>
-    </p:extLst>
-  </p:cSld>
-  <p:clrMapOvr>
-    <a:masterClrMapping/>
-  </p:clrMapOvr>
-</p:sld>
-</file>
-
-<file path=ppt/slides/slide26.xml><?xml version="1.0" encoding="utf-8"?>
-<p:sld xmlns:a="http://schemas.openxmlformats.org/drawingml/2006/main" xmlns:r="http://schemas.openxmlformats.org/officeDocument/2006/relationships" xmlns:p="http://schemas.openxmlformats.org/presentationml/2006/main">
-  <p:cSld>
-    <p:spTree>
-      <p:nvGrpSpPr>
-        <p:cNvPr id="1" name=""/>
-        <p:cNvGrpSpPr/>
-        <p:nvPr/>
-      </p:nvGrpSpPr>
-      <p:grpSpPr>
-        <a:xfrm>
-          <a:off x="0" y="0"/>
-          <a:ext cx="0" cy="0"/>
-          <a:chOff x="0" y="0"/>
-          <a:chExt cx="0" cy="0"/>
-        </a:xfrm>
-      </p:grpSpPr>
-      <p:sp>
-        <p:nvSpPr>
-          <p:cNvPr id="2" name="Title 1">
-            <a:extLst>
-              <a:ext uri="{FF2B5EF4-FFF2-40B4-BE49-F238E27FC236}">
-                <a16:creationId xmlns:a16="http://schemas.microsoft.com/office/drawing/2014/main" id="{FC85C0F8-A5B9-1B8B-0FB8-AC737FB54B8A}"/>
-              </a:ext>
-            </a:extLst>
-          </p:cNvPr>
-          <p:cNvSpPr>
-            <a:spLocks noGrp="1"/>
-          </p:cNvSpPr>
-          <p:nvPr>
-            <p:ph type="title"/>
-          </p:nvPr>
-        </p:nvSpPr>
-        <p:spPr/>
-        <p:txBody>
-          <a:bodyPr/>
-          <a:lstStyle/>
-          <a:p>
-            <a:r>
-              <a:rPr lang="en-US" dirty="0"/>
-              <a:t>Detour – Data Preparation</a:t>
-            </a:r>
-          </a:p>
-        </p:txBody>
-      </p:sp>
-      <p:sp>
-        <p:nvSpPr>
-          <p:cNvPr id="3" name="Content Placeholder 2">
-            <a:extLst>
-              <a:ext uri="{FF2B5EF4-FFF2-40B4-BE49-F238E27FC236}">
-                <a16:creationId xmlns:a16="http://schemas.microsoft.com/office/drawing/2014/main" id="{ED0DDFF6-5FAF-AB7F-2F5F-79C4CB2D7137}"/>
-              </a:ext>
-            </a:extLst>
-          </p:cNvPr>
-          <p:cNvSpPr>
-            <a:spLocks noGrp="1"/>
-          </p:cNvSpPr>
-          <p:nvPr>
-            <p:ph idx="1"/>
-          </p:nvPr>
-        </p:nvSpPr>
-        <p:spPr/>
-        <p:txBody>
-          <a:bodyPr/>
-          <a:lstStyle/>
-          <a:p>
-            <a:r>
-              <a:rPr lang="en-US" dirty="0"/>
-              <a:t>As noted, there is often specific data preparation needed. </a:t>
-            </a:r>
-          </a:p>
-          <a:p>
-            <a:r>
-              <a:rPr lang="en-US" dirty="0"/>
-              <a:t>This is a good chance to make a prep function. </a:t>
-            </a:r>
-          </a:p>
-          <a:p>
-            <a:pPr lvl="1"/>
-            <a:r>
-              <a:rPr lang="en-US" dirty="0"/>
-              <a:t>Input – original data format. </a:t>
-            </a:r>
-          </a:p>
-          <a:p>
-            <a:pPr lvl="1"/>
-            <a:r>
-              <a:rPr lang="en-US" dirty="0"/>
-              <a:t>Output – what you need. </a:t>
-            </a:r>
-          </a:p>
-          <a:p>
-            <a:pPr lvl="1"/>
-            <a:r>
-              <a:rPr lang="en-US" dirty="0"/>
-              <a:t>Arguments (optional) – can you configure different options to handle more scenarios. </a:t>
-            </a:r>
-          </a:p>
-          <a:p>
-            <a:r>
-              <a:rPr lang="en-US" dirty="0"/>
-              <a:t>This isn’t mandatory (unless specified) but is good practice. </a:t>
-            </a:r>
-          </a:p>
-        </p:txBody>
-      </p:sp>
-    </p:spTree>
-    <p:extLst>
-      <p:ext uri="{BB962C8B-B14F-4D97-AF65-F5344CB8AC3E}">
-        <p14:creationId xmlns:p14="http://schemas.microsoft.com/office/powerpoint/2010/main" val="698242479"/>
-      </p:ext>
-    </p:extLst>
-  </p:cSld>
-  <p:clrMapOvr>
-    <a:masterClrMapping/>
-  </p:clrMapOvr>
-</p:sld>
-</file>
-
-<file path=ppt/slides/slide27.xml><?xml version="1.0" encoding="utf-8"?>
-<p:sld xmlns:a="http://schemas.openxmlformats.org/drawingml/2006/main" xmlns:r="http://schemas.openxmlformats.org/officeDocument/2006/relationships" xmlns:p="http://schemas.openxmlformats.org/presentationml/2006/main">
-  <p:cSld>
-    <p:spTree>
-      <p:nvGrpSpPr>
-        <p:cNvPr id="1" name=""/>
-        <p:cNvGrpSpPr/>
-        <p:nvPr/>
-      </p:nvGrpSpPr>
-      <p:grpSpPr>
-        <a:xfrm>
-          <a:off x="0" y="0"/>
-          <a:ext cx="0" cy="0"/>
-          <a:chOff x="0" y="0"/>
-          <a:chExt cx="0" cy="0"/>
-        </a:xfrm>
-      </p:grpSpPr>
-      <p:sp>
-        <p:nvSpPr>
-          <p:cNvPr id="2" name="Title 1">
-            <a:extLst>
-              <a:ext uri="{FF2B5EF4-FFF2-40B4-BE49-F238E27FC236}">
-                <a16:creationId xmlns:a16="http://schemas.microsoft.com/office/drawing/2014/main" id="{F269D49D-03CB-7D55-2DA3-AE6BC19514A8}"/>
-              </a:ext>
-            </a:extLst>
-          </p:cNvPr>
-          <p:cNvSpPr>
-            <a:spLocks noGrp="1"/>
-          </p:cNvSpPr>
-          <p:nvPr>
-            <p:ph type="title"/>
-          </p:nvPr>
-        </p:nvSpPr>
-        <p:spPr/>
-        <p:txBody>
-          <a:bodyPr/>
-          <a:lstStyle/>
-          <a:p>
-            <a:r>
-              <a:rPr lang="en-US" dirty="0"/>
-              <a:t>What do I need to Remember?</a:t>
-            </a:r>
-          </a:p>
-        </p:txBody>
-      </p:sp>
-      <p:sp>
-        <p:nvSpPr>
-          <p:cNvPr id="3" name="Content Placeholder 2">
-            <a:extLst>
-              <a:ext uri="{FF2B5EF4-FFF2-40B4-BE49-F238E27FC236}">
-                <a16:creationId xmlns:a16="http://schemas.microsoft.com/office/drawing/2014/main" id="{AAECF1AF-5E31-7404-F6ED-F2A1B092ED21}"/>
-              </a:ext>
-            </a:extLst>
-          </p:cNvPr>
-          <p:cNvSpPr>
-            <a:spLocks noGrp="1"/>
-          </p:cNvSpPr>
-          <p:nvPr>
-            <p:ph idx="1"/>
-          </p:nvPr>
-        </p:nvSpPr>
-        <p:spPr/>
-        <p:txBody>
-          <a:bodyPr/>
-          <a:lstStyle/>
-          <a:p>
-            <a:r>
-              <a:rPr lang="en-US" dirty="0"/>
-              <a:t>The workbook contains several examples done by hand, this is for info, use libraries. </a:t>
-            </a:r>
-          </a:p>
-          <a:p>
-            <a:pPr lvl="1"/>
-            <a:r>
-              <a:rPr lang="en-US" dirty="0"/>
-              <a:t>Some are slightly simplified, all are more annoying than using premade functions. </a:t>
-            </a:r>
-          </a:p>
-          <a:p>
-            <a:pPr lvl="1"/>
-            <a:r>
-              <a:rPr lang="en-US" dirty="0"/>
-              <a:t>You don’t </a:t>
-            </a:r>
-          </a:p>
-        </p:txBody>
-      </p:sp>
-    </p:spTree>
-    <p:extLst>
-      <p:ext uri="{BB962C8B-B14F-4D97-AF65-F5344CB8AC3E}">
-        <p14:creationId xmlns:p14="http://schemas.microsoft.com/office/powerpoint/2010/main" val="1528431993"/>
-      </p:ext>
-    </p:extLst>
-  </p:cSld>
-  <p:clrMapOvr>
-    <a:masterClrMapping/>
-  </p:clrMapOvr>
-</p:sld>
-</file>
-
-<file path=ppt/slides/slide28.xml><?xml version="1.0" encoding="utf-8"?>
-<p:sld xmlns:a="http://schemas.openxmlformats.org/drawingml/2006/main" xmlns:r="http://schemas.openxmlformats.org/officeDocument/2006/relationships" xmlns:p="http://schemas.openxmlformats.org/presentationml/2006/main">
-  <p:cSld>
-    <p:spTree>
-      <p:nvGrpSpPr>
-        <p:cNvPr id="1" name=""/>
-        <p:cNvGrpSpPr/>
-        <p:nvPr/>
-      </p:nvGrpSpPr>
-      <p:grpSpPr>
-        <a:xfrm>
-          <a:off x="0" y="0"/>
-          <a:ext cx="0" cy="0"/>
-          <a:chOff x="0" y="0"/>
-          <a:chExt cx="0" cy="0"/>
-        </a:xfrm>
-      </p:grpSpPr>
-      <p:sp>
-        <p:nvSpPr>
-          <p:cNvPr id="2" name="Title 1">
-            <a:extLst>
-              <a:ext uri="{FF2B5EF4-FFF2-40B4-BE49-F238E27FC236}">
-                <a16:creationId xmlns:a16="http://schemas.microsoft.com/office/drawing/2014/main" id="{34F01CDF-4C42-615F-3534-C70346B9D37E}"/>
-              </a:ext>
-            </a:extLst>
-          </p:cNvPr>
-          <p:cNvSpPr>
-            <a:spLocks noGrp="1"/>
-          </p:cNvSpPr>
-          <p:nvPr>
-            <p:ph type="title"/>
-          </p:nvPr>
-        </p:nvSpPr>
-        <p:spPr/>
-        <p:txBody>
-          <a:bodyPr/>
-          <a:lstStyle/>
-          <a:p>
-            <a:r>
-              <a:rPr lang="en-US" dirty="0"/>
-              <a:t>Drive to Survive</a:t>
-            </a:r>
-          </a:p>
-        </p:txBody>
-      </p:sp>
-      <p:sp>
-        <p:nvSpPr>
-          <p:cNvPr id="3" name="Content Placeholder 2">
-            <a:extLst>
-              <a:ext uri="{FF2B5EF4-FFF2-40B4-BE49-F238E27FC236}">
-                <a16:creationId xmlns:a16="http://schemas.microsoft.com/office/drawing/2014/main" id="{70857D2F-67D7-F96B-6DDC-1C5AA5E093D5}"/>
-              </a:ext>
-            </a:extLst>
-          </p:cNvPr>
-          <p:cNvSpPr>
-            <a:spLocks noGrp="1"/>
-          </p:cNvSpPr>
-          <p:nvPr>
-            <p:ph idx="1"/>
-          </p:nvPr>
-        </p:nvSpPr>
-        <p:spPr>
-          <a:xfrm>
-            <a:off x="1451579" y="2015732"/>
-            <a:ext cx="9603275" cy="4037749"/>
-          </a:xfrm>
-        </p:spPr>
-        <p:txBody>
-          <a:bodyPr/>
-          <a:lstStyle/>
-          <a:p>
-            <a:r>
-              <a:rPr lang="en-US" dirty="0"/>
-              <a:t>Survival is relevant in many real-world applications. </a:t>
-            </a:r>
-          </a:p>
-          <a:p>
-            <a:r>
-              <a:rPr lang="en-US" dirty="0"/>
-              <a:t>May need to prep data, but after that most things are easy. </a:t>
-            </a:r>
-          </a:p>
-          <a:p>
-            <a:pPr lvl="1"/>
-            <a:r>
-              <a:rPr lang="en-US" dirty="0"/>
-              <a:t>Time/event may not exist in that format in original data – e.g. “end date” needs math. </a:t>
-            </a:r>
-          </a:p>
-          <a:p>
-            <a:r>
-              <a:rPr lang="en-US" dirty="0"/>
-              <a:t>Not critically important to most other topics we need, but may come up…</a:t>
-            </a:r>
-          </a:p>
-          <a:p>
-            <a:pPr lvl="1"/>
-            <a:r>
-              <a:rPr lang="en-US" dirty="0"/>
-              <a:t>Put the basics in your toolbox and be ready to expand on details as needed. </a:t>
-            </a:r>
-          </a:p>
-          <a:p>
-            <a:pPr lvl="1"/>
-            <a:r>
-              <a:rPr lang="en-US" dirty="0"/>
-              <a:t>The project in the next semester might have some survival relevant stuff…</a:t>
-            </a:r>
-          </a:p>
-        </p:txBody>
-      </p:sp>
-    </p:spTree>
-    <p:extLst>
-      <p:ext uri="{BB962C8B-B14F-4D97-AF65-F5344CB8AC3E}">
-        <p14:creationId xmlns:p14="http://schemas.microsoft.com/office/powerpoint/2010/main" val="2139251949"/>
-      </p:ext>
-    </p:extLst>
-  </p:cSld>
-  <p:clrMapOvr>
-    <a:masterClrMapping/>
-  </p:clrMapOvr>
-</p:sld>
-</file>
-
-<file path=ppt/slides/slide3.xml><?xml version="1.0" encoding="utf-8"?>
-<p:sld xmlns:a="http://schemas.openxmlformats.org/drawingml/2006/main" xmlns:r="http://schemas.openxmlformats.org/officeDocument/2006/relationships" xmlns:p="http://schemas.openxmlformats.org/presentationml/2006/main">
-  <p:cSld>
-    <p:spTree>
-      <p:nvGrpSpPr>
-        <p:cNvPr id="1" name=""/>
-        <p:cNvGrpSpPr/>
-        <p:nvPr/>
-      </p:nvGrpSpPr>
-      <p:grpSpPr>
-        <a:xfrm>
-          <a:off x="0" y="0"/>
-          <a:ext cx="0" cy="0"/>
-          <a:chOff x="0" y="0"/>
-          <a:chExt cx="0" cy="0"/>
-        </a:xfrm>
-      </p:grpSpPr>
-      <p:sp>
-        <p:nvSpPr>
-          <p:cNvPr id="2" name="Title 1">
-            <a:extLst>
-              <a:ext uri="{FF2B5EF4-FFF2-40B4-BE49-F238E27FC236}">
                 <a16:creationId xmlns:a16="http://schemas.microsoft.com/office/drawing/2014/main" id="{0EC7982B-1EEF-B1F9-10DC-9A2810553655}"/>
               </a:ext>
             </a:extLst>
@@ -7348,7 +7906,7 @@
 </p:sld>
 </file>
 
-<file path=ppt/slides/slide4.xml><?xml version="1.0" encoding="utf-8"?>
+<file path=ppt/slides/slide6.xml><?xml version="1.0" encoding="utf-8"?>
 <p:sld xmlns:a="http://schemas.openxmlformats.org/drawingml/2006/main" xmlns:r="http://schemas.openxmlformats.org/officeDocument/2006/relationships" xmlns:p="http://schemas.openxmlformats.org/presentationml/2006/main">
   <p:cSld>
     <p:spTree>
@@ -7504,7 +8062,7 @@
 </p:sld>
 </file>
 
-<file path=ppt/slides/slide5.xml><?xml version="1.0" encoding="utf-8"?>
+<file path=ppt/slides/slide7.xml><?xml version="1.0" encoding="utf-8"?>
 <p:sld xmlns:a="http://schemas.openxmlformats.org/drawingml/2006/main" xmlns:r="http://schemas.openxmlformats.org/officeDocument/2006/relationships" xmlns:p="http://schemas.openxmlformats.org/presentationml/2006/main">
   <p:cSld>
     <p:spTree>
@@ -7617,7 +8175,7 @@
 </p:sld>
 </file>
 
-<file path=ppt/slides/slide6.xml><?xml version="1.0" encoding="utf-8"?>
+<file path=ppt/slides/slide8.xml><?xml version="1.0" encoding="utf-8"?>
 <p:sld xmlns:a="http://schemas.openxmlformats.org/drawingml/2006/main" xmlns:r="http://schemas.openxmlformats.org/officeDocument/2006/relationships" xmlns:p="http://schemas.openxmlformats.org/presentationml/2006/main">
   <p:cSld>
     <p:spTree>
@@ -7736,7 +8294,7 @@
           <a:p>
             <a:r>
               <a:rPr lang="en-US" dirty="0"/>
-              <a:t>Data prep work is common. </a:t>
+              <a:t>Data prep work may be needed. </a:t>
             </a:r>
           </a:p>
         </p:txBody>
@@ -7784,292 +8342,6 @@
 </p:sld>
 </file>
 
-<file path=ppt/slides/slide7.xml><?xml version="1.0" encoding="utf-8"?>
-<p:sld xmlns:a="http://schemas.openxmlformats.org/drawingml/2006/main" xmlns:r="http://schemas.openxmlformats.org/officeDocument/2006/relationships" xmlns:p="http://schemas.openxmlformats.org/presentationml/2006/main">
-  <p:cSld>
-    <p:spTree>
-      <p:nvGrpSpPr>
-        <p:cNvPr id="1" name=""/>
-        <p:cNvGrpSpPr/>
-        <p:nvPr/>
-      </p:nvGrpSpPr>
-      <p:grpSpPr>
-        <a:xfrm>
-          <a:off x="0" y="0"/>
-          <a:ext cx="0" cy="0"/>
-          <a:chOff x="0" y="0"/>
-          <a:chExt cx="0" cy="0"/>
-        </a:xfrm>
-      </p:grpSpPr>
-      <p:sp>
-        <p:nvSpPr>
-          <p:cNvPr id="2" name="Title 1">
-            <a:extLst>
-              <a:ext uri="{FF2B5EF4-FFF2-40B4-BE49-F238E27FC236}">
-                <a16:creationId xmlns:a16="http://schemas.microsoft.com/office/drawing/2014/main" id="{4E46076B-A2B1-CC75-026F-BCB9BD05800B}"/>
-              </a:ext>
-            </a:extLst>
-          </p:cNvPr>
-          <p:cNvSpPr>
-            <a:spLocks noGrp="1"/>
-          </p:cNvSpPr>
-          <p:nvPr>
-            <p:ph type="title"/>
-          </p:nvPr>
-        </p:nvSpPr>
-        <p:spPr/>
-        <p:txBody>
-          <a:bodyPr/>
-          <a:lstStyle/>
-          <a:p>
-            <a:r>
-              <a:rPr lang="en-US" dirty="0"/>
-              <a:t>Get Granular</a:t>
-            </a:r>
-          </a:p>
-        </p:txBody>
-      </p:sp>
-      <p:sp>
-        <p:nvSpPr>
-          <p:cNvPr id="3" name="Content Placeholder 2">
-            <a:extLst>
-              <a:ext uri="{FF2B5EF4-FFF2-40B4-BE49-F238E27FC236}">
-                <a16:creationId xmlns:a16="http://schemas.microsoft.com/office/drawing/2014/main" id="{0CF5A4BD-42B2-0CE4-8D5A-7CAA3490C1C8}"/>
-              </a:ext>
-            </a:extLst>
-          </p:cNvPr>
-          <p:cNvSpPr>
-            <a:spLocks noGrp="1"/>
-          </p:cNvSpPr>
-          <p:nvPr>
-            <p:ph idx="1"/>
-          </p:nvPr>
-        </p:nvSpPr>
-        <p:spPr>
-          <a:xfrm>
-            <a:off x="1451579" y="1853754"/>
-            <a:ext cx="9603275" cy="4199727"/>
-          </a:xfrm>
-        </p:spPr>
-        <p:txBody>
-          <a:bodyPr/>
-          <a:lstStyle/>
-          <a:p>
-            <a:r>
-              <a:rPr lang="en-US" dirty="0"/>
-              <a:t>Survival works over time. </a:t>
-            </a:r>
-          </a:p>
-          <a:p>
-            <a:r>
-              <a:rPr lang="en-US" dirty="0"/>
-              <a:t>Time can be aggregated many different ways (per day/week/month/second…)</a:t>
-            </a:r>
-          </a:p>
-          <a:p>
-            <a:r>
-              <a:rPr lang="en-US" dirty="0"/>
-              <a:t>It is important that you are consistent. </a:t>
-            </a:r>
-          </a:p>
-          <a:p>
-            <a:r>
-              <a:rPr lang="en-US" dirty="0"/>
-              <a:t>Some data (especially sensors, </a:t>
-            </a:r>
-            <a:r>
-              <a:rPr lang="en-US" dirty="0" err="1"/>
-              <a:t>iot</a:t>
-            </a:r>
-            <a:r>
-              <a:rPr lang="en-US" dirty="0"/>
-              <a:t> type stuff) may generate data at 1000hz. </a:t>
-            </a:r>
-          </a:p>
-          <a:p>
-            <a:r>
-              <a:rPr lang="en-US" dirty="0"/>
-              <a:t>If condensing, think about a reasonable approach. </a:t>
-            </a:r>
-          </a:p>
-          <a:p>
-            <a:pPr lvl="1"/>
-            <a:r>
-              <a:rPr lang="en-US" dirty="0"/>
-              <a:t>Aggregate several time steps to one – take mean, median or similar. </a:t>
-            </a:r>
-          </a:p>
-          <a:p>
-            <a:pPr lvl="1"/>
-            <a:r>
-              <a:rPr lang="en-US" dirty="0"/>
-              <a:t>Sample one of every Y steps – take a step unchanged, lose data. </a:t>
-            </a:r>
-          </a:p>
-          <a:p>
-            <a:pPr lvl="1"/>
-            <a:r>
-              <a:rPr lang="en-US" dirty="0"/>
-              <a:t>Domain knowledge thing (e.g. how fast is a “thing” on this sensor). </a:t>
-            </a:r>
-          </a:p>
-        </p:txBody>
-      </p:sp>
-    </p:spTree>
-    <p:extLst>
-      <p:ext uri="{BB962C8B-B14F-4D97-AF65-F5344CB8AC3E}">
-        <p14:creationId xmlns:p14="http://schemas.microsoft.com/office/powerpoint/2010/main" val="2331552144"/>
-      </p:ext>
-    </p:extLst>
-  </p:cSld>
-  <p:clrMapOvr>
-    <a:masterClrMapping/>
-  </p:clrMapOvr>
-</p:sld>
-</file>
-
-<file path=ppt/slides/slide8.xml><?xml version="1.0" encoding="utf-8"?>
-<p:sld xmlns:a="http://schemas.openxmlformats.org/drawingml/2006/main" xmlns:r="http://schemas.openxmlformats.org/officeDocument/2006/relationships" xmlns:p="http://schemas.openxmlformats.org/presentationml/2006/main">
-  <p:cSld>
-    <p:spTree>
-      <p:nvGrpSpPr>
-        <p:cNvPr id="1" name=""/>
-        <p:cNvGrpSpPr/>
-        <p:nvPr/>
-      </p:nvGrpSpPr>
-      <p:grpSpPr>
-        <a:xfrm>
-          <a:off x="0" y="0"/>
-          <a:ext cx="0" cy="0"/>
-          <a:chOff x="0" y="0"/>
-          <a:chExt cx="0" cy="0"/>
-        </a:xfrm>
-      </p:grpSpPr>
-      <p:sp>
-        <p:nvSpPr>
-          <p:cNvPr id="2" name="Title 1">
-            <a:extLst>
-              <a:ext uri="{FF2B5EF4-FFF2-40B4-BE49-F238E27FC236}">
-                <a16:creationId xmlns:a16="http://schemas.microsoft.com/office/drawing/2014/main" id="{EC11E58B-7914-00EE-E8C1-AD7DF4B6D84D}"/>
-              </a:ext>
-            </a:extLst>
-          </p:cNvPr>
-          <p:cNvSpPr>
-            <a:spLocks noGrp="1"/>
-          </p:cNvSpPr>
-          <p:nvPr>
-            <p:ph type="title"/>
-          </p:nvPr>
-        </p:nvSpPr>
-        <p:spPr/>
-        <p:txBody>
-          <a:bodyPr/>
-          <a:lstStyle/>
-          <a:p>
-            <a:r>
-              <a:rPr lang="en-US" dirty="0"/>
-              <a:t>Survival Functions</a:t>
-            </a:r>
-          </a:p>
-        </p:txBody>
-      </p:sp>
-      <p:sp>
-        <p:nvSpPr>
-          <p:cNvPr id="3" name="Content Placeholder 2">
-            <a:extLst>
-              <a:ext uri="{FF2B5EF4-FFF2-40B4-BE49-F238E27FC236}">
-                <a16:creationId xmlns:a16="http://schemas.microsoft.com/office/drawing/2014/main" id="{5A0757C6-B0CD-58BE-F79E-ED41A8D9D03D}"/>
-              </a:ext>
-            </a:extLst>
-          </p:cNvPr>
-          <p:cNvSpPr>
-            <a:spLocks noGrp="1"/>
-          </p:cNvSpPr>
-          <p:nvPr>
-            <p:ph idx="1"/>
-          </p:nvPr>
-        </p:nvSpPr>
-        <p:spPr>
-          <a:xfrm>
-            <a:off x="6253215" y="2015732"/>
-            <a:ext cx="5757171" cy="3450613"/>
-          </a:xfrm>
-        </p:spPr>
-        <p:txBody>
-          <a:bodyPr/>
-          <a:lstStyle/>
-          <a:p>
-            <a:r>
-              <a:rPr lang="en-US" dirty="0"/>
-              <a:t>Survival functions look like this(–</a:t>
-            </a:r>
-            <a:r>
-              <a:rPr lang="en-US" dirty="0" err="1"/>
-              <a:t>ish</a:t>
-            </a:r>
-            <a:r>
-              <a:rPr lang="en-US" dirty="0"/>
-              <a:t>) when plotted.</a:t>
-            </a:r>
-          </a:p>
-          <a:p>
-            <a:r>
-              <a:rPr lang="en-US" dirty="0"/>
-              <a:t>Track total up to that point. </a:t>
-            </a:r>
-          </a:p>
-          <a:p>
-            <a:pPr lvl="1"/>
-            <a:r>
-              <a:rPr lang="en-US" dirty="0"/>
-              <a:t>How many are left?</a:t>
-            </a:r>
-          </a:p>
-        </p:txBody>
-      </p:sp>
-      <p:pic>
-        <p:nvPicPr>
-          <p:cNvPr id="4" name="Picture 3">
-            <a:extLst>
-              <a:ext uri="{FF2B5EF4-FFF2-40B4-BE49-F238E27FC236}">
-                <a16:creationId xmlns:a16="http://schemas.microsoft.com/office/drawing/2014/main" id="{7A653A07-9087-2046-8B74-1A363F0A1121}"/>
-              </a:ext>
-            </a:extLst>
-          </p:cNvPr>
-          <p:cNvPicPr>
-            <a:picLocks noChangeAspect="1"/>
-          </p:cNvPicPr>
-          <p:nvPr/>
-        </p:nvPicPr>
-        <p:blipFill>
-          <a:blip r:embed="rId2"/>
-          <a:stretch>
-            <a:fillRect/>
-          </a:stretch>
-        </p:blipFill>
-        <p:spPr>
-          <a:xfrm>
-            <a:off x="181613" y="2182113"/>
-            <a:ext cx="6071603" cy="3117850"/>
-          </a:xfrm>
-          <a:prstGeom prst="rect">
-            <a:avLst/>
-          </a:prstGeom>
-        </p:spPr>
-      </p:pic>
-    </p:spTree>
-    <p:extLst>
-      <p:ext uri="{BB962C8B-B14F-4D97-AF65-F5344CB8AC3E}">
-        <p14:creationId xmlns:p14="http://schemas.microsoft.com/office/powerpoint/2010/main" val="3057595040"/>
-      </p:ext>
-    </p:extLst>
-  </p:cSld>
-  <p:clrMapOvr>
-    <a:masterClrMapping/>
-  </p:clrMapOvr>
-</p:sld>
-</file>
-
 <file path=ppt/slides/slide9.xml><?xml version="1.0" encoding="utf-8"?>
 <p:sld xmlns:a="http://schemas.openxmlformats.org/drawingml/2006/main" xmlns:r="http://schemas.openxmlformats.org/officeDocument/2006/relationships" xmlns:p="http://schemas.openxmlformats.org/presentationml/2006/main">
   <p:cSld>
@@ -8092,7 +8364,7 @@
           <p:cNvPr id="2" name="Title 1">
             <a:extLst>
               <a:ext uri="{FF2B5EF4-FFF2-40B4-BE49-F238E27FC236}">
-                <a16:creationId xmlns:a16="http://schemas.microsoft.com/office/drawing/2014/main" id="{170AC16D-4043-CA71-C9C5-FB282683A38A}"/>
+                <a16:creationId xmlns:a16="http://schemas.microsoft.com/office/drawing/2014/main" id="{4E46076B-A2B1-CC75-026F-BCB9BD05800B}"/>
               </a:ext>
             </a:extLst>
           </p:cNvPr>
@@ -8110,7 +8382,7 @@
           <a:p>
             <a:r>
               <a:rPr lang="en-US" dirty="0"/>
-              <a:t>Kaplan Meier Curve</a:t>
+              <a:t>Get Granular</a:t>
             </a:r>
           </a:p>
         </p:txBody>
@@ -8120,7 +8392,7 @@
           <p:cNvPr id="3" name="Content Placeholder 2">
             <a:extLst>
               <a:ext uri="{FF2B5EF4-FFF2-40B4-BE49-F238E27FC236}">
-                <a16:creationId xmlns:a16="http://schemas.microsoft.com/office/drawing/2014/main" id="{9102623E-1C1B-BB5C-D7A7-FC704EA9F7A8}"/>
+                <a16:creationId xmlns:a16="http://schemas.microsoft.com/office/drawing/2014/main" id="{0CF5A4BD-42B2-0CE4-8D5A-7CAA3490C1C8}"/>
               </a:ext>
             </a:extLst>
           </p:cNvPr>
@@ -8133,8 +8405,8 @@
         </p:nvSpPr>
         <p:spPr>
           <a:xfrm>
-            <a:off x="8216900" y="2015732"/>
-            <a:ext cx="3746499" cy="3450613"/>
+            <a:off x="1451579" y="1853754"/>
+            <a:ext cx="9603275" cy="4199727"/>
           </a:xfrm>
         </p:spPr>
         <p:txBody>
@@ -8143,62 +8415,74 @@
           <a:p>
             <a:r>
               <a:rPr lang="en-US" dirty="0"/>
-              <a:t>This type of plot is a KM curve, and is common in survival. </a:t>
+              <a:t>Survival works over time. </a:t>
+            </a:r>
+          </a:p>
+          <a:p>
+            <a:r>
+              <a:rPr lang="en-US" dirty="0"/>
+              <a:t>Time can be aggregated many different ways (per day/week/month/second…)</a:t>
+            </a:r>
+          </a:p>
+          <a:p>
+            <a:r>
+              <a:rPr lang="en-US" dirty="0"/>
+              <a:t>It is important that you are consistent. </a:t>
+            </a:r>
+          </a:p>
+          <a:p>
+            <a:r>
+              <a:rPr lang="en-US" dirty="0"/>
+              <a:t>Some data (especially sensors, </a:t>
+            </a:r>
+            <a:r>
+              <a:rPr lang="en-US" dirty="0" err="1"/>
+              <a:t>iot</a:t>
+            </a:r>
+            <a:r>
+              <a:rPr lang="en-US" dirty="0"/>
+              <a:t> type stuff) may generate data at 1000hz. </a:t>
+            </a:r>
+          </a:p>
+          <a:p>
+            <a:r>
+              <a:rPr lang="en-US" dirty="0"/>
+              <a:t>If condensing, think about a reasonable approach. </a:t>
             </a:r>
           </a:p>
           <a:p>
             <a:pPr lvl="1"/>
             <a:r>
               <a:rPr lang="en-US" dirty="0"/>
-              <a:t>Y – probability. </a:t>
+              <a:t>Aggregate several time steps to one – take mean, median or similar. </a:t>
             </a:r>
           </a:p>
           <a:p>
             <a:pPr lvl="1"/>
             <a:r>
               <a:rPr lang="en-US" dirty="0"/>
-              <a:t>X – time scale. </a:t>
-            </a:r>
-          </a:p>
-          <a:p>
-            <a:endParaRPr lang="en-US" dirty="0"/>
-          </a:p>
-        </p:txBody>
-      </p:sp>
-      <p:pic>
-        <p:nvPicPr>
-          <p:cNvPr id="4" name="Picture 3" descr="Kaplan–Meier Curve Explained Visually | Survival Analysis Made Easy">
-            <a:extLst>
-              <a:ext uri="{FF2B5EF4-FFF2-40B4-BE49-F238E27FC236}">
-                <a16:creationId xmlns:a16="http://schemas.microsoft.com/office/drawing/2014/main" id="{21987270-6A38-AB80-1D06-66B2D73F1A8C}"/>
-              </a:ext>
-            </a:extLst>
-          </p:cNvPr>
-          <p:cNvPicPr>
-            <a:picLocks noChangeAspect="1"/>
-          </p:cNvPicPr>
-          <p:nvPr/>
-        </p:nvPicPr>
-        <p:blipFill>
-          <a:blip r:embed="rId2"/>
-          <a:stretch>
-            <a:fillRect/>
-          </a:stretch>
-        </p:blipFill>
-        <p:spPr>
-          <a:xfrm>
-            <a:off x="444501" y="1853754"/>
-            <a:ext cx="7772400" cy="4371975"/>
-          </a:xfrm>
-          <a:prstGeom prst="rect">
-            <a:avLst/>
-          </a:prstGeom>
-        </p:spPr>
-      </p:pic>
+              <a:t>Sample one of every Y steps – take a step unchanged, lose data. </a:t>
+            </a:r>
+          </a:p>
+          <a:p>
+            <a:pPr lvl="1"/>
+            <a:r>
+              <a:rPr lang="en-US" dirty="0"/>
+              <a:t>Domain knowledge thing (e.g. how fast is a “thing” on this sensor). </a:t>
+            </a:r>
+          </a:p>
+          <a:p>
+            <a:r>
+              <a:rPr lang="en-US" dirty="0"/>
+              <a:t>Use datetime library if you need to do date related math. </a:t>
+            </a:r>
+          </a:p>
+        </p:txBody>
+      </p:sp>
     </p:spTree>
     <p:extLst>
       <p:ext uri="{BB962C8B-B14F-4D97-AF65-F5344CB8AC3E}">
-        <p14:creationId xmlns:p14="http://schemas.microsoft.com/office/powerpoint/2010/main" val="853032451"/>
+        <p14:creationId xmlns:p14="http://schemas.microsoft.com/office/powerpoint/2010/main" val="2331552144"/>
       </p:ext>
     </p:extLst>
   </p:cSld>
@@ -8462,21 +8746,21 @@
 </file>
 
 <file path=customXml/item1.xml><?xml version="1.0" encoding="utf-8"?>
+<?mso-contentType ?>
+<FormTemplates xmlns="http://schemas.microsoft.com/sharepoint/v3/contenttype/forms">
+  <Display>DocumentLibraryForm</Display>
+  <Edit>DocumentLibraryForm</Edit>
+  <New>DocumentLibraryForm</New>
+</FormTemplates>
+</file>
+
+<file path=customXml/item2.xml><?xml version="1.0" encoding="utf-8"?>
 <p:properties xmlns:p="http://schemas.microsoft.com/office/2006/metadata/properties" xmlns:xsi="http://www.w3.org/2001/XMLSchema-instance" xmlns:pc="http://schemas.microsoft.com/office/infopath/2007/PartnerControls">
   <documentManagement>
     <_ip_UnifiedCompliancePolicyUIAction xmlns="http://schemas.microsoft.com/sharepoint/v3" xsi:nil="true"/>
     <_ip_UnifiedCompliancePolicyProperties xmlns="http://schemas.microsoft.com/sharepoint/v3" xsi:nil="true"/>
   </documentManagement>
 </p:properties>
-</file>
-
-<file path=customXml/item2.xml><?xml version="1.0" encoding="utf-8"?>
-<?mso-contentType ?>
-<FormTemplates xmlns="http://schemas.microsoft.com/sharepoint/v3/contenttype/forms">
-  <Display>DocumentLibraryForm</Display>
-  <Edit>DocumentLibraryForm</Edit>
-  <New>DocumentLibraryForm</New>
-</FormTemplates>
 </file>
 
 <file path=customXml/item3.xml><?xml version="1.0" encoding="utf-8"?>
@@ -8720,6 +9004,14 @@
 </file>
 
 <file path=customXml/itemProps1.xml><?xml version="1.0" encoding="utf-8"?>
+<ds:datastoreItem xmlns:ds="http://schemas.openxmlformats.org/officeDocument/2006/customXml" ds:itemID="{9D433788-E2A9-474A-A9AA-7C51D76AEEF8}">
+  <ds:schemaRefs>
+    <ds:schemaRef ds:uri="http://schemas.microsoft.com/sharepoint/v3/contenttype/forms"/>
+  </ds:schemaRefs>
+</ds:datastoreItem>
+</file>
+
+<file path=customXml/itemProps2.xml><?xml version="1.0" encoding="utf-8"?>
 <ds:datastoreItem xmlns:ds="http://schemas.openxmlformats.org/officeDocument/2006/customXml" ds:itemID="{5D419135-506A-4156-B115-5D5FDADAB719}">
   <ds:schemaRefs>
     <ds:schemaRef ds:uri="http://purl.org/dc/elements/1.1/"/>
@@ -8733,14 +9025,6 @@
     <ds:schemaRef ds:uri="http://schemas.microsoft.com/office/2006/metadata/properties"/>
     <ds:schemaRef ds:uri="http://www.w3.org/XML/1998/namespace"/>
     <ds:schemaRef ds:uri="http://purl.org/dc/terms/"/>
-  </ds:schemaRefs>
-</ds:datastoreItem>
-</file>
-
-<file path=customXml/itemProps2.xml><?xml version="1.0" encoding="utf-8"?>
-<ds:datastoreItem xmlns:ds="http://schemas.openxmlformats.org/officeDocument/2006/customXml" ds:itemID="{9D433788-E2A9-474A-A9AA-7C51D76AEEF8}">
-  <ds:schemaRefs>
-    <ds:schemaRef ds:uri="http://schemas.microsoft.com/sharepoint/v3/contenttype/forms"/>
   </ds:schemaRefs>
 </ds:datastoreItem>
 </file>
